--- a/decks/staging-parity/staging-parity.pptx
+++ b/decks/staging-parity/staging-parity.pptx
@@ -1226,7 +1226,7 @@
       </p:grpSpPr>
       <p:pic>
         <p:nvPicPr>
-          <p:cNvPr id="2" name="Image 0" descr="/tmp/slide-1787840525842-br6cm36yvlw.png">    </p:cNvPr>
+          <p:cNvPr id="2" name="Image 0" descr="/tmp/slide-1787841974363-auki7l3b786.png">    </p:cNvPr>
           <p:cNvPicPr>
             <a:picLocks noChangeAspect="1"/>
           </p:cNvPicPr>
@@ -1275,7 +1275,7 @@
       </p:grpSpPr>
       <p:pic>
         <p:nvPicPr>
-          <p:cNvPr id="2" name="Image 0" descr="/tmp/slide-1787840526128-nc2s5g5iz5.png">    </p:cNvPr>
+          <p:cNvPr id="2" name="Image 0" descr="/tmp/slide-1787841974631-e4ago41lp64.png">    </p:cNvPr>
           <p:cNvPicPr>
             <a:picLocks noChangeAspect="1"/>
           </p:cNvPicPr>
@@ -1324,7 +1324,7 @@
       </p:grpSpPr>
       <p:pic>
         <p:nvPicPr>
-          <p:cNvPr id="2" name="Image 0" descr="/tmp/slide-1787840526392-q97l3ndub7e.png">    </p:cNvPr>
+          <p:cNvPr id="2" name="Image 0" descr="/tmp/slide-1787841974973-zt59jt9dlu.png">    </p:cNvPr>
           <p:cNvPicPr>
             <a:picLocks noChangeAspect="1"/>
           </p:cNvPicPr>
@@ -1373,7 +1373,7 @@
       </p:grpSpPr>
       <p:pic>
         <p:nvPicPr>
-          <p:cNvPr id="2" name="Image 0" descr="/tmp/slide-1787840526673-wma2vf0u0om.png">    </p:cNvPr>
+          <p:cNvPr id="2" name="Image 0" descr="/tmp/slide-1787841975252-5664vn98m3v.png">    </p:cNvPr>
           <p:cNvPicPr>
             <a:picLocks noChangeAspect="1"/>
           </p:cNvPicPr>
@@ -1422,7 +1422,7 @@
       </p:grpSpPr>
       <p:pic>
         <p:nvPicPr>
-          <p:cNvPr id="2" name="Image 0" descr="/tmp/slide-1787840526950-xccbpn5cby.png">    </p:cNvPr>
+          <p:cNvPr id="2" name="Image 0" descr="/tmp/slide-1787841975520-hlcewq11e8.png">    </p:cNvPr>
           <p:cNvPicPr>
             <a:picLocks noChangeAspect="1"/>
           </p:cNvPicPr>

--- a/decks/staging-parity/staging-parity.pptx
+++ b/decks/staging-parity/staging-parity.pptx
@@ -1210,6 +1210,13 @@
 <file path=ppt/slides/slide1.xml><?xml version="1.0" encoding="utf-8"?>
 <p:sld xmlns:a="http://schemas.openxmlformats.org/drawingml/2006/main" xmlns:r="http://schemas.openxmlformats.org/officeDocument/2006/relationships" xmlns:p="http://schemas.openxmlformats.org/presentationml/2006/main">
   <p:cSld name="Slide 1">
+    <p:bg>
+      <p:bgPr>
+        <a:solidFill>
+          <a:srgbClr val="0E0E11"/>
+        </a:solidFill>
+      </p:bgPr>
+    </p:bg>
     <p:spTree>
       <p:nvGrpSpPr>
         <p:cNvPr id="1" name=""/>
@@ -1224,30 +1231,297 @@
           <a:chExt cx="0" cy="0"/>
         </a:xfrm>
       </p:grpSpPr>
-      <p:pic>
-        <p:nvPicPr>
-          <p:cNvPr id="2" name="Image 0" descr="/tmp/slide-1787841974363-auki7l3b786.png">    </p:cNvPr>
-          <p:cNvPicPr>
-            <a:picLocks noChangeAspect="1"/>
-          </p:cNvPicPr>
-          <p:nvPr/>
-        </p:nvPicPr>
-        <p:blipFill>
-          <a:blip r:embed="rId1"/>
-          <a:stretch>
-            <a:fillRect/>
-          </a:stretch>
-        </p:blipFill>
-        <p:spPr>
-          <a:xfrm>
-            <a:off x="0" y="0"/>
-            <a:ext cx="12188952" cy="6858000"/>
-          </a:xfrm>
-          <a:prstGeom prst="rect">
-            <a:avLst/>
-          </a:prstGeom>
-        </p:spPr>
-      </p:pic>
+      <p:sp>
+        <p:nvSpPr>
+          <p:cNvPr id="2" name="Text 0"/>
+          <p:cNvSpPr/>
+          <p:nvPr/>
+        </p:nvSpPr>
+        <p:spPr>
+          <a:xfrm>
+            <a:off x="677098" y="541734"/>
+            <a:ext cx="3941888" cy="260747"/>
+          </a:xfrm>
+          <a:prstGeom prst="rect">
+            <a:avLst/>
+          </a:prstGeom>
+          <a:noFill/>
+          <a:ln/>
+        </p:spPr>
+        <p:txBody>
+          <a:bodyPr wrap="square" lIns="0" tIns="0" rIns="0" bIns="0" rtlCol="0" anchor="t"/>
+          <a:lstStyle/>
+          <a:p>
+            <a:pPr algn="l" indent="0" marL="0">
+              <a:lnSpc>
+                <a:spcPts val="2053"/>
+              </a:lnSpc>
+              <a:buNone/>
+            </a:pPr>
+            <a:r>
+              <a:rPr lang="en-US" sz="1466" dirty="0">
+                <a:solidFill>
+                  <a:srgbClr val="6B7280"/>
+                </a:solidFill>
+                <a:latin typeface="Inter" pitchFamily="34" charset="0"/>
+                <a:ea typeface="Inter" pitchFamily="34" charset="-122"/>
+                <a:cs typeface="Inter" pitchFamily="34" charset="-120"/>
+              </a:rPr>
+              <a:t>PLATFORM ENGINEERING · INTERNAL</a:t>
+            </a:r>
+            <a:endParaRPr lang="en-US" sz="1466" dirty="0"/>
+          </a:p>
+        </p:txBody>
+      </p:sp>
+      <p:sp>
+        <p:nvSpPr>
+          <p:cNvPr id="3" name="Text 1"/>
+          <p:cNvSpPr/>
+          <p:nvPr/>
+        </p:nvSpPr>
+        <p:spPr>
+          <a:xfrm>
+            <a:off x="10646685" y="541734"/>
+            <a:ext cx="882473" cy="260747"/>
+          </a:xfrm>
+          <a:prstGeom prst="rect">
+            <a:avLst/>
+          </a:prstGeom>
+          <a:noFill/>
+          <a:ln/>
+        </p:spPr>
+        <p:txBody>
+          <a:bodyPr wrap="square" lIns="0" tIns="0" rIns="0" bIns="0" rtlCol="0" anchor="t"/>
+          <a:lstStyle/>
+          <a:p>
+            <a:pPr algn="l" indent="0" marL="0">
+              <a:lnSpc>
+                <a:spcPts val="2053"/>
+              </a:lnSpc>
+              <a:buNone/>
+            </a:pPr>
+            <a:r>
+              <a:rPr lang="en-US" sz="1466" dirty="0">
+                <a:solidFill>
+                  <a:srgbClr val="8B7BF0"/>
+                </a:solidFill>
+                <a:latin typeface="JetBrains Mono" pitchFamily="34" charset="0"/>
+                <a:ea typeface="JetBrains Mono" pitchFamily="34" charset="-122"/>
+                <a:cs typeface="JetBrains Mono" pitchFamily="34" charset="-120"/>
+              </a:rPr>
+              <a:t>01 / 05</a:t>
+            </a:r>
+            <a:endParaRPr lang="en-US" sz="1466" dirty="0"/>
+          </a:p>
+        </p:txBody>
+      </p:sp>
+      <p:sp>
+        <p:nvSpPr>
+          <p:cNvPr id="4" name="Text 2"/>
+          <p:cNvSpPr/>
+          <p:nvPr/>
+        </p:nvSpPr>
+        <p:spPr>
+          <a:xfrm>
+            <a:off x="677098" y="2059384"/>
+            <a:ext cx="744748" cy="33734"/>
+          </a:xfrm>
+          <a:prstGeom prst="rect">
+            <a:avLst/>
+          </a:prstGeom>
+          <a:solidFill>
+            <a:srgbClr val="8B7BF0"/>
+          </a:solidFill>
+          <a:ln/>
+        </p:spPr>
+        <p:txBody>
+          <a:bodyPr wrap="square" rtlCol="0" anchor="ctr"/>
+          <a:lstStyle/>
+          <a:p>
+            <a:pPr indent="0" marL="0">
+              <a:buNone/>
+            </a:pPr>
+            <a:endParaRPr lang="en-US" dirty="0"/>
+          </a:p>
+        </p:txBody>
+      </p:sp>
+      <p:sp>
+        <p:nvSpPr>
+          <p:cNvPr id="5" name="Text 3"/>
+          <p:cNvSpPr/>
+          <p:nvPr/>
+        </p:nvSpPr>
+        <p:spPr>
+          <a:xfrm>
+            <a:off x="677098" y="2363986"/>
+            <a:ext cx="11051451" cy="894159"/>
+          </a:xfrm>
+          <a:prstGeom prst="rect">
+            <a:avLst/>
+          </a:prstGeom>
+          <a:noFill/>
+          <a:ln/>
+        </p:spPr>
+        <p:txBody>
+          <a:bodyPr wrap="square" lIns="0" tIns="0" rIns="0" bIns="0" rtlCol="0" anchor="t"/>
+          <a:lstStyle/>
+          <a:p>
+            <a:pPr algn="l" indent="0" marL="0">
+              <a:lnSpc>
+                <a:spcPts val="7039"/>
+              </a:lnSpc>
+              <a:spcBef>
+                <a:spcPts val="2133"/>
+              </a:spcBef>
+              <a:buNone/>
+            </a:pPr>
+            <a:r>
+              <a:rPr lang="en-US" sz="5866" b="1" dirty="0">
+                <a:solidFill>
+                  <a:srgbClr val="F4F4F5"/>
+                </a:solidFill>
+                <a:latin typeface="Inter" pitchFamily="34" charset="0"/>
+                <a:ea typeface="Inter" pitchFamily="34" charset="-122"/>
+                <a:cs typeface="Inter" pitchFamily="34" charset="-120"/>
+              </a:rPr>
+              <a:t>Why staging lies</a:t>
+            </a:r>
+            <a:endParaRPr lang="en-US" sz="5866" dirty="0"/>
+          </a:p>
+        </p:txBody>
+      </p:sp>
+      <p:sp>
+        <p:nvSpPr>
+          <p:cNvPr id="6" name="Text 4"/>
+          <p:cNvSpPr/>
+          <p:nvPr/>
+        </p:nvSpPr>
+        <p:spPr>
+          <a:xfrm>
+            <a:off x="677098" y="3495080"/>
+            <a:ext cx="8979127" cy="863600"/>
+          </a:xfrm>
+          <a:prstGeom prst="rect">
+            <a:avLst/>
+          </a:prstGeom>
+          <a:noFill/>
+          <a:ln/>
+        </p:spPr>
+        <p:txBody>
+          <a:bodyPr wrap="square" lIns="0" tIns="0" rIns="0" bIns="0" rtlCol="0" anchor="t"/>
+          <a:lstStyle/>
+          <a:p>
+            <a:pPr algn="l" indent="0" marL="0">
+              <a:lnSpc>
+                <a:spcPts val="3400"/>
+              </a:lnSpc>
+              <a:spcBef>
+                <a:spcPts val="1866"/>
+              </a:spcBef>
+              <a:buNone/>
+            </a:pPr>
+            <a:r>
+              <a:rPr lang="en-US" sz="2266" dirty="0">
+                <a:solidFill>
+                  <a:srgbClr val="9CA3AF"/>
+                </a:solidFill>
+                <a:latin typeface="Inter" pitchFamily="34" charset="0"/>
+                <a:ea typeface="Inter" pitchFamily="34" charset="-122"/>
+                <a:cs typeface="Inter" pitchFamily="34" charset="-120"/>
+              </a:rPr>
+              <a:t>Every place staging differs from production is where the incidents come from. A green run is evidence about staging.</a:t>
+            </a:r>
+            <a:endParaRPr lang="en-US" sz="2266" dirty="0"/>
+          </a:p>
+        </p:txBody>
+      </p:sp>
+      <p:sp>
+        <p:nvSpPr>
+          <p:cNvPr id="7" name="Text 5"/>
+          <p:cNvSpPr/>
+          <p:nvPr/>
+        </p:nvSpPr>
+        <p:spPr>
+          <a:xfrm>
+            <a:off x="677098" y="4697214"/>
+            <a:ext cx="11051451" cy="260747"/>
+          </a:xfrm>
+          <a:prstGeom prst="rect">
+            <a:avLst/>
+          </a:prstGeom>
+          <a:noFill/>
+          <a:ln/>
+        </p:spPr>
+        <p:txBody>
+          <a:bodyPr wrap="square" lIns="0" tIns="0" rIns="0" bIns="0" rtlCol="0" anchor="t"/>
+          <a:lstStyle/>
+          <a:p>
+            <a:pPr algn="l" indent="0" marL="0">
+              <a:lnSpc>
+                <a:spcPts val="2053"/>
+              </a:lnSpc>
+              <a:spcBef>
+                <a:spcPts val="2666"/>
+              </a:spcBef>
+              <a:buNone/>
+            </a:pPr>
+            <a:r>
+              <a:rPr lang="en-US" sz="1466" dirty="0">
+                <a:solidFill>
+                  <a:srgbClr val="6B7280"/>
+                </a:solidFill>
+                <a:latin typeface="JetBrains Mono" pitchFamily="34" charset="0"/>
+                <a:ea typeface="JetBrains Mono" pitchFamily="34" charset="-122"/>
+                <a:cs typeface="JetBrains Mono" pitchFamily="34" charset="-120"/>
+              </a:rPr>
+              <a:t>Presenter · Team</a:t>
+            </a:r>
+            <a:endParaRPr lang="en-US" sz="1466" dirty="0"/>
+          </a:p>
+        </p:txBody>
+      </p:sp>
+      <p:sp>
+        <p:nvSpPr>
+          <p:cNvPr id="8" name="Text 6"/>
+          <p:cNvSpPr/>
+          <p:nvPr/>
+        </p:nvSpPr>
+        <p:spPr>
+          <a:xfrm>
+            <a:off x="460403" y="6079331"/>
+            <a:ext cx="11051451" cy="236934"/>
+          </a:xfrm>
+          <a:prstGeom prst="rect">
+            <a:avLst/>
+          </a:prstGeom>
+          <a:noFill/>
+          <a:ln/>
+        </p:spPr>
+        <p:txBody>
+          <a:bodyPr wrap="square" lIns="0" tIns="0" rIns="0" bIns="0" rtlCol="0" anchor="t"/>
+          <a:lstStyle/>
+          <a:p>
+            <a:pPr algn="r" indent="0" marL="0">
+              <a:lnSpc>
+                <a:spcPts val="1866"/>
+              </a:lnSpc>
+              <a:buNone/>
+            </a:pPr>
+            <a:r>
+              <a:rPr lang="en-US" sz="1333" dirty="0">
+                <a:solidFill>
+                  <a:srgbClr val="6B7280"/>
+                </a:solidFill>
+                <a:latin typeface="Inter" pitchFamily="34" charset="0"/>
+                <a:ea typeface="Inter" pitchFamily="34" charset="-122"/>
+                <a:cs typeface="Inter" pitchFamily="34" charset="-120"/>
+              </a:rPr>
+              <a:t>No figures in this deck — the argument is mechanical, and no gap here can be sized from a source we can cite.</a:t>
+            </a:r>
+            <a:endParaRPr lang="en-US" sz="1333" dirty="0"/>
+          </a:p>
+        </p:txBody>
+      </p:sp>
     </p:spTree>
   </p:cSld>
   <p:clrMapOvr>
@@ -1259,6 +1533,13 @@
 <file path=ppt/slides/slide2.xml><?xml version="1.0" encoding="utf-8"?>
 <p:sld xmlns:a="http://schemas.openxmlformats.org/drawingml/2006/main" xmlns:r="http://schemas.openxmlformats.org/officeDocument/2006/relationships" xmlns:p="http://schemas.openxmlformats.org/presentationml/2006/main">
   <p:cSld name="Slide 2">
+    <p:bg>
+      <p:bgPr>
+        <a:solidFill>
+          <a:srgbClr val="0E0E11"/>
+        </a:solidFill>
+      </p:bgPr>
+    </p:bg>
     <p:spTree>
       <p:nvGrpSpPr>
         <p:cNvPr id="1" name=""/>
@@ -1273,30 +1554,869 @@
           <a:chExt cx="0" cy="0"/>
         </a:xfrm>
       </p:grpSpPr>
+      <p:sp>
+        <p:nvSpPr>
+          <p:cNvPr id="2" name="Text 0"/>
+          <p:cNvSpPr/>
+          <p:nvPr/>
+        </p:nvSpPr>
+        <p:spPr>
+          <a:xfrm>
+            <a:off x="677098" y="541734"/>
+            <a:ext cx="1423572" cy="260747"/>
+          </a:xfrm>
+          <a:prstGeom prst="rect">
+            <a:avLst/>
+          </a:prstGeom>
+          <a:noFill/>
+          <a:ln/>
+        </p:spPr>
+        <p:txBody>
+          <a:bodyPr wrap="square" lIns="0" tIns="0" rIns="0" bIns="0" rtlCol="0" anchor="t"/>
+          <a:lstStyle/>
+          <a:p>
+            <a:pPr algn="l" indent="0" marL="0">
+              <a:lnSpc>
+                <a:spcPts val="2053"/>
+              </a:lnSpc>
+              <a:buNone/>
+            </a:pPr>
+            <a:r>
+              <a:rPr lang="en-US" sz="1466" dirty="0">
+                <a:solidFill>
+                  <a:srgbClr val="6B7280"/>
+                </a:solidFill>
+                <a:latin typeface="Inter" pitchFamily="34" charset="0"/>
+                <a:ea typeface="Inter" pitchFamily="34" charset="-122"/>
+                <a:cs typeface="Inter" pitchFamily="34" charset="-120"/>
+              </a:rPr>
+              <a:t>THE PREMISE</a:t>
+            </a:r>
+            <a:endParaRPr lang="en-US" sz="1466" dirty="0"/>
+          </a:p>
+        </p:txBody>
+      </p:sp>
+      <p:sp>
+        <p:nvSpPr>
+          <p:cNvPr id="3" name="Text 1"/>
+          <p:cNvSpPr/>
+          <p:nvPr/>
+        </p:nvSpPr>
+        <p:spPr>
+          <a:xfrm>
+            <a:off x="10646685" y="541734"/>
+            <a:ext cx="882473" cy="260747"/>
+          </a:xfrm>
+          <a:prstGeom prst="rect">
+            <a:avLst/>
+          </a:prstGeom>
+          <a:noFill/>
+          <a:ln/>
+        </p:spPr>
+        <p:txBody>
+          <a:bodyPr wrap="square" lIns="0" tIns="0" rIns="0" bIns="0" rtlCol="0" anchor="t"/>
+          <a:lstStyle/>
+          <a:p>
+            <a:pPr algn="l" indent="0" marL="0">
+              <a:lnSpc>
+                <a:spcPts val="2053"/>
+              </a:lnSpc>
+              <a:buNone/>
+            </a:pPr>
+            <a:r>
+              <a:rPr lang="en-US" sz="1466" dirty="0">
+                <a:solidFill>
+                  <a:srgbClr val="8B7BF0"/>
+                </a:solidFill>
+                <a:latin typeface="JetBrains Mono" pitchFamily="34" charset="0"/>
+                <a:ea typeface="JetBrains Mono" pitchFamily="34" charset="-122"/>
+                <a:cs typeface="JetBrains Mono" pitchFamily="34" charset="-120"/>
+              </a:rPr>
+              <a:t>02 / 05</a:t>
+            </a:r>
+            <a:endParaRPr lang="en-US" sz="1466" dirty="0"/>
+          </a:p>
+        </p:txBody>
+      </p:sp>
+      <p:sp>
+        <p:nvSpPr>
+          <p:cNvPr id="4" name="Text 2"/>
+          <p:cNvSpPr/>
+          <p:nvPr/>
+        </p:nvSpPr>
+        <p:spPr>
+          <a:xfrm>
+            <a:off x="677098" y="971748"/>
+            <a:ext cx="11051451" cy="486767"/>
+          </a:xfrm>
+          <a:prstGeom prst="rect">
+            <a:avLst/>
+          </a:prstGeom>
+          <a:noFill/>
+          <a:ln/>
+        </p:spPr>
+        <p:txBody>
+          <a:bodyPr wrap="square" lIns="0" tIns="0" rIns="0" bIns="0" rtlCol="0" anchor="t"/>
+          <a:lstStyle/>
+          <a:p>
+            <a:pPr algn="l" indent="0" marL="0">
+              <a:lnSpc>
+                <a:spcPts val="3833"/>
+              </a:lnSpc>
+              <a:spcBef>
+                <a:spcPts val="1333"/>
+              </a:spcBef>
+              <a:buNone/>
+            </a:pPr>
+            <a:r>
+              <a:rPr lang="en-US" sz="3066" b="1" dirty="0">
+                <a:solidFill>
+                  <a:srgbClr val="F4F4F5"/>
+                </a:solidFill>
+                <a:latin typeface="Inter" pitchFamily="34" charset="0"/>
+                <a:ea typeface="Inter" pitchFamily="34" charset="-122"/>
+                <a:cs typeface="Inter" pitchFamily="34" charset="-120"/>
+              </a:rPr>
+              <a:t>A green run is evidence about staging</a:t>
+            </a:r>
+            <a:endParaRPr lang="en-US" sz="3066" dirty="0"/>
+          </a:p>
+        </p:txBody>
+      </p:sp>
+      <p:sp>
+        <p:nvSpPr>
+          <p:cNvPr id="5" name="Text 3"/>
+          <p:cNvSpPr/>
+          <p:nvPr/>
+        </p:nvSpPr>
+        <p:spPr>
+          <a:xfrm>
+            <a:off x="677098" y="1763316"/>
+            <a:ext cx="3216463" cy="2445147"/>
+          </a:xfrm>
+          <a:prstGeom prst="roundRect">
+            <a:avLst>
+              <a:gd name="adj" fmla="val 3116"/>
+            </a:avLst>
+          </a:prstGeom>
+          <a:noFill/>
+          <a:ln w="12698">
+            <a:solidFill>
+              <a:srgbClr val="26262C"/>
+            </a:solidFill>
+          </a:ln>
+        </p:spPr>
+        <p:txBody>
+          <a:bodyPr wrap="square" rtlCol="0" anchor="ctr"/>
+          <a:lstStyle/>
+          <a:p>
+            <a:pPr indent="0" marL="0">
+              <a:buNone/>
+            </a:pPr>
+            <a:endParaRPr lang="en-US" dirty="0"/>
+          </a:p>
+        </p:txBody>
+      </p:sp>
+      <p:sp>
+        <p:nvSpPr>
+          <p:cNvPr id="6" name="Text 4"/>
+          <p:cNvSpPr/>
+          <p:nvPr/>
+        </p:nvSpPr>
+        <p:spPr>
+          <a:xfrm>
+            <a:off x="926670" y="2012950"/>
+            <a:ext cx="2771665" cy="260747"/>
+          </a:xfrm>
+          <a:prstGeom prst="rect">
+            <a:avLst/>
+          </a:prstGeom>
+          <a:noFill/>
+          <a:ln/>
+        </p:spPr>
+        <p:txBody>
+          <a:bodyPr wrap="square" lIns="0" tIns="0" rIns="0" bIns="0" rtlCol="0" anchor="t"/>
+          <a:lstStyle/>
+          <a:p>
+            <a:pPr algn="l" indent="0" marL="0">
+              <a:lnSpc>
+                <a:spcPts val="2053"/>
+              </a:lnSpc>
+              <a:buNone/>
+            </a:pPr>
+            <a:r>
+              <a:rPr lang="en-US" sz="1466" dirty="0">
+                <a:solidFill>
+                  <a:srgbClr val="8B7BF0"/>
+                </a:solidFill>
+                <a:latin typeface="JetBrains Mono" pitchFamily="34" charset="0"/>
+                <a:ea typeface="JetBrains Mono" pitchFamily="34" charset="-122"/>
+                <a:cs typeface="JetBrains Mono" pitchFamily="34" charset="-120"/>
+              </a:rPr>
+              <a:t>01</a:t>
+            </a:r>
+            <a:endParaRPr lang="en-US" sz="1466" dirty="0"/>
+          </a:p>
+        </p:txBody>
+      </p:sp>
+      <p:sp>
+        <p:nvSpPr>
+          <p:cNvPr id="7" name="Text 5"/>
+          <p:cNvSpPr/>
+          <p:nvPr/>
+        </p:nvSpPr>
+        <p:spPr>
+          <a:xfrm>
+            <a:off x="926670" y="2375297"/>
+            <a:ext cx="2771665" cy="308173"/>
+          </a:xfrm>
+          <a:prstGeom prst="rect">
+            <a:avLst/>
+          </a:prstGeom>
+          <a:noFill/>
+          <a:ln/>
+        </p:spPr>
+        <p:txBody>
+          <a:bodyPr wrap="square" lIns="0" tIns="0" rIns="0" bIns="0" rtlCol="0" anchor="t"/>
+          <a:lstStyle/>
+          <a:p>
+            <a:pPr algn="l" indent="0" marL="0">
+              <a:lnSpc>
+                <a:spcPts val="2426"/>
+              </a:lnSpc>
+              <a:spcBef>
+                <a:spcPts val="800"/>
+              </a:spcBef>
+              <a:buNone/>
+            </a:pPr>
+            <a:r>
+              <a:rPr lang="en-US" sz="1866" b="1" dirty="0">
+                <a:solidFill>
+                  <a:srgbClr val="F4F4F5"/>
+                </a:solidFill>
+                <a:latin typeface="Inter" pitchFamily="34" charset="0"/>
+                <a:ea typeface="Inter" pitchFamily="34" charset="-122"/>
+                <a:cs typeface="Inter" pitchFamily="34" charset="-120"/>
+              </a:rPr>
+              <a:t>Build a model</a:t>
+            </a:r>
+            <a:endParaRPr lang="en-US" sz="1866" dirty="0"/>
+          </a:p>
+        </p:txBody>
+      </p:sp>
+      <p:sp>
+        <p:nvSpPr>
+          <p:cNvPr id="8" name="Text 6"/>
+          <p:cNvSpPr/>
+          <p:nvPr/>
+        </p:nvSpPr>
+        <p:spPr>
+          <a:xfrm>
+            <a:off x="926670" y="2818805"/>
+            <a:ext cx="2771665" cy="1031081"/>
+          </a:xfrm>
+          <a:prstGeom prst="rect">
+            <a:avLst/>
+          </a:prstGeom>
+          <a:noFill/>
+          <a:ln/>
+        </p:spPr>
+        <p:txBody>
+          <a:bodyPr wrap="square" lIns="0" tIns="0" rIns="0" bIns="0" rtlCol="0" anchor="t"/>
+          <a:lstStyle/>
+          <a:p>
+            <a:pPr algn="l" indent="0" marL="0">
+              <a:lnSpc>
+                <a:spcPts val="2706"/>
+              </a:lnSpc>
+              <a:spcBef>
+                <a:spcPts val="1067"/>
+              </a:spcBef>
+              <a:buNone/>
+            </a:pPr>
+            <a:r>
+              <a:rPr lang="en-US" sz="1866" dirty="0">
+                <a:solidFill>
+                  <a:srgbClr val="9CA3AF"/>
+                </a:solidFill>
+                <a:latin typeface="Inter" pitchFamily="34" charset="0"/>
+                <a:ea typeface="Inter" pitchFamily="34" charset="-122"/>
+                <a:cs typeface="Inter" pitchFamily="34" charset="-120"/>
+              </a:rPr>
+              <a:t>Staging is production with the expensive parts removed.</a:t>
+            </a:r>
+            <a:endParaRPr lang="en-US" sz="1866" dirty="0"/>
+          </a:p>
+        </p:txBody>
+      </p:sp>
       <p:pic>
         <p:nvPicPr>
-          <p:cNvPr id="2" name="Image 0" descr="/tmp/slide-1787841974631-e4ago41lp64.png">    </p:cNvPr>
+          <p:cNvPr id="9" name="Image 0" descr="preencoded.png">    </p:cNvPr>
           <p:cNvPicPr>
             <a:picLocks noChangeAspect="1"/>
           </p:cNvPicPr>
           <p:nvPr/>
         </p:nvPicPr>
         <p:blipFill>
-          <a:blip r:embed="rId1"/>
+          <a:blip r:embed="rId1">
+            <a:extLst>
+              <a:ext uri="{96DAC541-7B7A-43D3-8B79-37D633B846F1}">
+                <asvg:svgBlip xmlns:asvg="http://schemas.microsoft.com/office/drawing/2016/SVG/main" r:embed="rId2"/>
+              </a:ext>
+            </a:extLst>
+          </a:blip>
           <a:stretch>
             <a:fillRect/>
           </a:stretch>
         </p:blipFill>
         <p:spPr>
           <a:xfrm>
-            <a:off x="0" y="0"/>
-            <a:ext cx="12188952" cy="6858000"/>
+            <a:off x="3893561" y="2901156"/>
+            <a:ext cx="592386" cy="169267"/>
           </a:xfrm>
           <a:prstGeom prst="rect">
             <a:avLst/>
           </a:prstGeom>
         </p:spPr>
       </p:pic>
+      <p:sp>
+        <p:nvSpPr>
+          <p:cNvPr id="10" name="Text 7"/>
+          <p:cNvSpPr/>
+          <p:nvPr/>
+        </p:nvSpPr>
+        <p:spPr>
+          <a:xfrm>
+            <a:off x="4485947" y="1763316"/>
+            <a:ext cx="3216463" cy="2445147"/>
+          </a:xfrm>
+          <a:prstGeom prst="roundRect">
+            <a:avLst>
+              <a:gd name="adj" fmla="val 3116"/>
+            </a:avLst>
+          </a:prstGeom>
+          <a:noFill/>
+          <a:ln w="12698">
+            <a:solidFill>
+              <a:srgbClr val="26262C"/>
+            </a:solidFill>
+          </a:ln>
+        </p:spPr>
+        <p:txBody>
+          <a:bodyPr wrap="square" rtlCol="0" anchor="ctr"/>
+          <a:lstStyle/>
+          <a:p>
+            <a:pPr indent="0" marL="0">
+              <a:buNone/>
+            </a:pPr>
+            <a:endParaRPr lang="en-US" dirty="0"/>
+          </a:p>
+        </p:txBody>
+      </p:sp>
+      <p:sp>
+        <p:nvSpPr>
+          <p:cNvPr id="11" name="Text 8"/>
+          <p:cNvSpPr/>
+          <p:nvPr/>
+        </p:nvSpPr>
+        <p:spPr>
+          <a:xfrm>
+            <a:off x="4735519" y="2012950"/>
+            <a:ext cx="2771665" cy="260747"/>
+          </a:xfrm>
+          <a:prstGeom prst="rect">
+            <a:avLst/>
+          </a:prstGeom>
+          <a:noFill/>
+          <a:ln/>
+        </p:spPr>
+        <p:txBody>
+          <a:bodyPr wrap="square" lIns="0" tIns="0" rIns="0" bIns="0" rtlCol="0" anchor="t"/>
+          <a:lstStyle/>
+          <a:p>
+            <a:pPr algn="l" indent="0" marL="0">
+              <a:lnSpc>
+                <a:spcPts val="2053"/>
+              </a:lnSpc>
+              <a:buNone/>
+            </a:pPr>
+            <a:r>
+              <a:rPr lang="en-US" sz="1466" dirty="0">
+                <a:solidFill>
+                  <a:srgbClr val="8B7BF0"/>
+                </a:solidFill>
+                <a:latin typeface="JetBrains Mono" pitchFamily="34" charset="0"/>
+                <a:ea typeface="JetBrains Mono" pitchFamily="34" charset="-122"/>
+                <a:cs typeface="JetBrains Mono" pitchFamily="34" charset="-120"/>
+              </a:rPr>
+              <a:t>02</a:t>
+            </a:r>
+            <a:endParaRPr lang="en-US" sz="1466" dirty="0"/>
+          </a:p>
+        </p:txBody>
+      </p:sp>
+      <p:sp>
+        <p:nvSpPr>
+          <p:cNvPr id="12" name="Text 9"/>
+          <p:cNvSpPr/>
+          <p:nvPr/>
+        </p:nvSpPr>
+        <p:spPr>
+          <a:xfrm>
+            <a:off x="4735519" y="2375297"/>
+            <a:ext cx="2771665" cy="308173"/>
+          </a:xfrm>
+          <a:prstGeom prst="rect">
+            <a:avLst/>
+          </a:prstGeom>
+          <a:noFill/>
+          <a:ln/>
+        </p:spPr>
+        <p:txBody>
+          <a:bodyPr wrap="square" lIns="0" tIns="0" rIns="0" bIns="0" rtlCol="0" anchor="t"/>
+          <a:lstStyle/>
+          <a:p>
+            <a:pPr algn="l" indent="0" marL="0">
+              <a:lnSpc>
+                <a:spcPts val="2426"/>
+              </a:lnSpc>
+              <a:spcBef>
+                <a:spcPts val="800"/>
+              </a:spcBef>
+              <a:buNone/>
+            </a:pPr>
+            <a:r>
+              <a:rPr lang="en-US" sz="1866" b="1" dirty="0">
+                <a:solidFill>
+                  <a:srgbClr val="F4F4F5"/>
+                </a:solidFill>
+                <a:latin typeface="Inter" pitchFamily="34" charset="0"/>
+                <a:ea typeface="Inter" pitchFamily="34" charset="-122"/>
+                <a:cs typeface="Inter" pitchFamily="34" charset="-120"/>
+              </a:rPr>
+              <a:t>Test the model</a:t>
+            </a:r>
+            <a:endParaRPr lang="en-US" sz="1866" dirty="0"/>
+          </a:p>
+        </p:txBody>
+      </p:sp>
+      <p:sp>
+        <p:nvSpPr>
+          <p:cNvPr id="13" name="Text 10"/>
+          <p:cNvSpPr/>
+          <p:nvPr/>
+        </p:nvSpPr>
+        <p:spPr>
+          <a:xfrm>
+            <a:off x="4735519" y="2818805"/>
+            <a:ext cx="2771665" cy="1031081"/>
+          </a:xfrm>
+          <a:prstGeom prst="rect">
+            <a:avLst/>
+          </a:prstGeom>
+          <a:noFill/>
+          <a:ln/>
+        </p:spPr>
+        <p:txBody>
+          <a:bodyPr wrap="square" lIns="0" tIns="0" rIns="0" bIns="0" rtlCol="0" anchor="t"/>
+          <a:lstStyle/>
+          <a:p>
+            <a:pPr algn="l" indent="0" marL="0">
+              <a:lnSpc>
+                <a:spcPts val="2706"/>
+              </a:lnSpc>
+              <a:spcBef>
+                <a:spcPts val="1067"/>
+              </a:spcBef>
+              <a:buNone/>
+            </a:pPr>
+            <a:r>
+              <a:rPr lang="en-US" sz="1866" dirty="0">
+                <a:solidFill>
+                  <a:srgbClr val="9CA3AF"/>
+                </a:solidFill>
+                <a:latin typeface="Inter" pitchFamily="34" charset="0"/>
+                <a:ea typeface="Inter" pitchFamily="34" charset="-122"/>
+                <a:cs typeface="Inter" pitchFamily="34" charset="-120"/>
+              </a:rPr>
+              <a:t>The suite exercises that model and comes back green.</a:t>
+            </a:r>
+            <a:endParaRPr lang="en-US" sz="1866" dirty="0"/>
+          </a:p>
+        </p:txBody>
+      </p:sp>
+      <p:pic>
+        <p:nvPicPr>
+          <p:cNvPr id="14" name="Image 1" descr="preencoded.png">    </p:cNvPr>
+          <p:cNvPicPr>
+            <a:picLocks noChangeAspect="1"/>
+          </p:cNvPicPr>
+          <p:nvPr/>
+        </p:nvPicPr>
+        <p:blipFill>
+          <a:blip r:embed="rId3">
+            <a:extLst>
+              <a:ext uri="{96DAC541-7B7A-43D3-8B79-37D633B846F1}">
+                <asvg:svgBlip xmlns:asvg="http://schemas.microsoft.com/office/drawing/2016/SVG/main" r:embed="rId4"/>
+              </a:ext>
+            </a:extLst>
+          </a:blip>
+          <a:stretch>
+            <a:fillRect/>
+          </a:stretch>
+        </p:blipFill>
+        <p:spPr>
+          <a:xfrm>
+            <a:off x="7702410" y="2901156"/>
+            <a:ext cx="592386" cy="169267"/>
+          </a:xfrm>
+          <a:prstGeom prst="rect">
+            <a:avLst/>
+          </a:prstGeom>
+        </p:spPr>
+      </p:pic>
+      <p:sp>
+        <p:nvSpPr>
+          <p:cNvPr id="15" name="Text 11"/>
+          <p:cNvSpPr/>
+          <p:nvPr/>
+        </p:nvSpPr>
+        <p:spPr>
+          <a:xfrm>
+            <a:off x="8294796" y="1763316"/>
+            <a:ext cx="3216463" cy="2445147"/>
+          </a:xfrm>
+          <a:prstGeom prst="roundRect">
+            <a:avLst>
+              <a:gd name="adj" fmla="val 3116"/>
+            </a:avLst>
+          </a:prstGeom>
+          <a:noFill/>
+          <a:ln w="12698">
+            <a:solidFill>
+              <a:srgbClr val="8B7BF0"/>
+            </a:solidFill>
+          </a:ln>
+        </p:spPr>
+        <p:txBody>
+          <a:bodyPr wrap="square" rtlCol="0" anchor="ctr"/>
+          <a:lstStyle/>
+          <a:p>
+            <a:pPr indent="0" marL="0">
+              <a:buNone/>
+            </a:pPr>
+            <a:endParaRPr lang="en-US" dirty="0"/>
+          </a:p>
+        </p:txBody>
+      </p:sp>
+      <p:sp>
+        <p:nvSpPr>
+          <p:cNvPr id="16" name="Text 12"/>
+          <p:cNvSpPr/>
+          <p:nvPr/>
+        </p:nvSpPr>
+        <p:spPr>
+          <a:xfrm>
+            <a:off x="8544368" y="2012950"/>
+            <a:ext cx="2771665" cy="260747"/>
+          </a:xfrm>
+          <a:prstGeom prst="rect">
+            <a:avLst/>
+          </a:prstGeom>
+          <a:noFill/>
+          <a:ln/>
+        </p:spPr>
+        <p:txBody>
+          <a:bodyPr wrap="square" lIns="0" tIns="0" rIns="0" bIns="0" rtlCol="0" anchor="t"/>
+          <a:lstStyle/>
+          <a:p>
+            <a:pPr algn="l" indent="0" marL="0">
+              <a:lnSpc>
+                <a:spcPts val="2053"/>
+              </a:lnSpc>
+              <a:buNone/>
+            </a:pPr>
+            <a:r>
+              <a:rPr lang="en-US" sz="1466" dirty="0">
+                <a:solidFill>
+                  <a:srgbClr val="8B7BF0"/>
+                </a:solidFill>
+                <a:latin typeface="JetBrains Mono" pitchFamily="34" charset="0"/>
+                <a:ea typeface="JetBrains Mono" pitchFamily="34" charset="-122"/>
+                <a:cs typeface="JetBrains Mono" pitchFamily="34" charset="-120"/>
+              </a:rPr>
+              <a:t>03</a:t>
+            </a:r>
+            <a:endParaRPr lang="en-US" sz="1466" dirty="0"/>
+          </a:p>
+        </p:txBody>
+      </p:sp>
+      <p:sp>
+        <p:nvSpPr>
+          <p:cNvPr id="17" name="Text 13"/>
+          <p:cNvSpPr/>
+          <p:nvPr/>
+        </p:nvSpPr>
+        <p:spPr>
+          <a:xfrm>
+            <a:off x="8544368" y="2375297"/>
+            <a:ext cx="2771665" cy="308173"/>
+          </a:xfrm>
+          <a:prstGeom prst="rect">
+            <a:avLst/>
+          </a:prstGeom>
+          <a:noFill/>
+          <a:ln/>
+        </p:spPr>
+        <p:txBody>
+          <a:bodyPr wrap="square" lIns="0" tIns="0" rIns="0" bIns="0" rtlCol="0" anchor="t"/>
+          <a:lstStyle/>
+          <a:p>
+            <a:pPr algn="l" indent="0" marL="0">
+              <a:lnSpc>
+                <a:spcPts val="2426"/>
+              </a:lnSpc>
+              <a:spcBef>
+                <a:spcPts val="800"/>
+              </a:spcBef>
+              <a:buNone/>
+            </a:pPr>
+            <a:r>
+              <a:rPr lang="en-US" sz="1866" b="1" dirty="0">
+                <a:solidFill>
+                  <a:srgbClr val="F4F4F5"/>
+                </a:solidFill>
+                <a:latin typeface="Inter" pitchFamily="34" charset="0"/>
+                <a:ea typeface="Inter" pitchFamily="34" charset="-122"/>
+                <a:cs typeface="Inter" pitchFamily="34" charset="-120"/>
+              </a:rPr>
+              <a:t>Claim the original</a:t>
+            </a:r>
+            <a:endParaRPr lang="en-US" sz="1866" dirty="0"/>
+          </a:p>
+        </p:txBody>
+      </p:sp>
+      <p:sp>
+        <p:nvSpPr>
+          <p:cNvPr id="18" name="Text 14"/>
+          <p:cNvSpPr/>
+          <p:nvPr/>
+        </p:nvSpPr>
+        <p:spPr>
+          <a:xfrm>
+            <a:off x="8544368" y="2818805"/>
+            <a:ext cx="2771665" cy="1031081"/>
+          </a:xfrm>
+          <a:prstGeom prst="rect">
+            <a:avLst/>
+          </a:prstGeom>
+          <a:noFill/>
+          <a:ln/>
+        </p:spPr>
+        <p:txBody>
+          <a:bodyPr wrap="square" lIns="0" tIns="0" rIns="0" bIns="0" rtlCol="0" anchor="t"/>
+          <a:lstStyle/>
+          <a:p>
+            <a:pPr algn="l" indent="0" marL="0">
+              <a:lnSpc>
+                <a:spcPts val="2706"/>
+              </a:lnSpc>
+              <a:spcBef>
+                <a:spcPts val="1067"/>
+              </a:spcBef>
+              <a:buNone/>
+            </a:pPr>
+            <a:r>
+              <a:rPr lang="en-US" sz="1866" dirty="0">
+                <a:solidFill>
+                  <a:srgbClr val="9CA3AF"/>
+                </a:solidFill>
+                <a:latin typeface="Inter" pitchFamily="34" charset="0"/>
+                <a:ea typeface="Inter" pitchFamily="34" charset="-122"/>
+                <a:cs typeface="Inter" pitchFamily="34" charset="-120"/>
+              </a:rPr>
+              <a:t>We report the result as if it were a fact about production.</a:t>
+            </a:r>
+            <a:endParaRPr lang="en-US" sz="1866" dirty="0"/>
+          </a:p>
+        </p:txBody>
+      </p:sp>
+      <p:sp>
+        <p:nvSpPr>
+          <p:cNvPr id="19" name="Shape 15"/>
+          <p:cNvSpPr/>
+          <p:nvPr/>
+        </p:nvSpPr>
+        <p:spPr>
+          <a:xfrm>
+            <a:off x="677098" y="4485680"/>
+            <a:ext cx="10834756" cy="0"/>
+          </a:xfrm>
+          <a:prstGeom prst="line">
+            <a:avLst/>
+          </a:prstGeom>
+          <a:noFill/>
+          <a:ln w="12698">
+            <a:solidFill>
+              <a:srgbClr val="26262C"/>
+            </a:solidFill>
+            <a:prstDash val="solid"/>
+          </a:ln>
+        </p:spPr>
+      </p:sp>
+      <p:sp>
+        <p:nvSpPr>
+          <p:cNvPr id="20" name="Shape 16"/>
+          <p:cNvSpPr/>
+          <p:nvPr/>
+        </p:nvSpPr>
+        <p:spPr>
+          <a:xfrm>
+            <a:off x="11505506" y="4479330"/>
+            <a:ext cx="0" cy="1430734"/>
+          </a:xfrm>
+          <a:prstGeom prst="line">
+            <a:avLst/>
+          </a:prstGeom>
+          <a:noFill/>
+          <a:ln w="12698">
+            <a:solidFill>
+              <a:srgbClr val="26262C"/>
+            </a:solidFill>
+            <a:prstDash val="solid"/>
+          </a:ln>
+        </p:spPr>
+      </p:sp>
+      <p:sp>
+        <p:nvSpPr>
+          <p:cNvPr id="21" name="Shape 17"/>
+          <p:cNvSpPr/>
+          <p:nvPr/>
+        </p:nvSpPr>
+        <p:spPr>
+          <a:xfrm>
+            <a:off x="677098" y="5903714"/>
+            <a:ext cx="10834756" cy="0"/>
+          </a:xfrm>
+          <a:prstGeom prst="line">
+            <a:avLst/>
+          </a:prstGeom>
+          <a:noFill/>
+          <a:ln w="12698">
+            <a:solidFill>
+              <a:srgbClr val="26262C"/>
+            </a:solidFill>
+            <a:prstDash val="solid"/>
+          </a:ln>
+        </p:spPr>
+      </p:sp>
+      <p:sp>
+        <p:nvSpPr>
+          <p:cNvPr id="22" name="Shape 18"/>
+          <p:cNvSpPr/>
+          <p:nvPr/>
+        </p:nvSpPr>
+        <p:spPr>
+          <a:xfrm>
+            <a:off x="689795" y="4479330"/>
+            <a:ext cx="0" cy="1430734"/>
+          </a:xfrm>
+          <a:prstGeom prst="line">
+            <a:avLst/>
+          </a:prstGeom>
+          <a:noFill/>
+          <a:ln w="25397">
+            <a:solidFill>
+              <a:srgbClr val="8B7BF0"/>
+            </a:solidFill>
+            <a:prstDash val="solid"/>
+          </a:ln>
+        </p:spPr>
+      </p:sp>
+      <p:sp>
+        <p:nvSpPr>
+          <p:cNvPr id="23" name="Text 19"/>
+          <p:cNvSpPr/>
+          <p:nvPr/>
+        </p:nvSpPr>
+        <p:spPr>
+          <a:xfrm>
+            <a:off x="973291" y="4762897"/>
+            <a:ext cx="10460168" cy="863600"/>
+          </a:xfrm>
+          <a:prstGeom prst="rect">
+            <a:avLst/>
+          </a:prstGeom>
+          <a:noFill/>
+          <a:ln/>
+        </p:spPr>
+        <p:txBody>
+          <a:bodyPr wrap="square" lIns="0" tIns="0" rIns="0" bIns="0" rtlCol="0" anchor="t"/>
+          <a:lstStyle/>
+          <a:p>
+            <a:pPr algn="l" indent="0" marL="0">
+              <a:lnSpc>
+                <a:spcPts val="3400"/>
+              </a:lnSpc>
+              <a:buNone/>
+            </a:pPr>
+            <a:r>
+              <a:rPr lang="en-US" sz="2266" dirty="0">
+                <a:solidFill>
+                  <a:srgbClr val="F4F4F5"/>
+                </a:solidFill>
+                <a:latin typeface="Inter" pitchFamily="34" charset="0"/>
+                <a:ea typeface="Inter" pitchFamily="34" charset="-122"/>
+                <a:cs typeface="Inter" pitchFamily="34" charset="-120"/>
+              </a:rPr>
+              <a:t>A green staging run is a true statement about staging. It turns false the moment we read it as a statement about production.</a:t>
+            </a:r>
+            <a:endParaRPr lang="en-US" sz="2266" dirty="0"/>
+          </a:p>
+        </p:txBody>
+      </p:sp>
+      <p:sp>
+        <p:nvSpPr>
+          <p:cNvPr id="24" name="Text 20"/>
+          <p:cNvSpPr/>
+          <p:nvPr/>
+        </p:nvSpPr>
+        <p:spPr>
+          <a:xfrm>
+            <a:off x="460403" y="6079331"/>
+            <a:ext cx="11051451" cy="236934"/>
+          </a:xfrm>
+          <a:prstGeom prst="rect">
+            <a:avLst/>
+          </a:prstGeom>
+          <a:noFill/>
+          <a:ln/>
+        </p:spPr>
+        <p:txBody>
+          <a:bodyPr wrap="square" lIns="0" tIns="0" rIns="0" bIns="0" rtlCol="0" anchor="t"/>
+          <a:lstStyle/>
+          <a:p>
+            <a:pPr algn="r" indent="0" marL="0">
+              <a:lnSpc>
+                <a:spcPts val="1866"/>
+              </a:lnSpc>
+              <a:buNone/>
+            </a:pPr>
+            <a:r>
+              <a:rPr lang="en-US" sz="1333" dirty="0">
+                <a:solidFill>
+                  <a:srgbClr val="6B7280"/>
+                </a:solidFill>
+                <a:latin typeface="Inter" pitchFamily="34" charset="0"/>
+                <a:ea typeface="Inter" pitchFamily="34" charset="-122"/>
+                <a:cs typeface="Inter" pitchFamily="34" charset="-120"/>
+              </a:rPr>
+              <a:t>No figures in this deck — the argument is mechanical, and no gap here can be sized from a source we can cite.</a:t>
+            </a:r>
+            <a:endParaRPr lang="en-US" sz="1333" dirty="0"/>
+          </a:p>
+        </p:txBody>
+      </p:sp>
     </p:spTree>
   </p:cSld>
   <p:clrMapOvr>
@@ -1308,6 +2428,13 @@
 <file path=ppt/slides/slide3.xml><?xml version="1.0" encoding="utf-8"?>
 <p:sld xmlns:a="http://schemas.openxmlformats.org/drawingml/2006/main" xmlns:r="http://schemas.openxmlformats.org/officeDocument/2006/relationships" xmlns:p="http://schemas.openxmlformats.org/presentationml/2006/main">
   <p:cSld name="Slide 3">
+    <p:bg>
+      <p:bgPr>
+        <a:solidFill>
+          <a:srgbClr val="0E0E11"/>
+        </a:solidFill>
+      </p:bgPr>
+    </p:bg>
     <p:spTree>
       <p:nvGrpSpPr>
         <p:cNvPr id="1" name=""/>
@@ -1322,30 +2449,829 @@
           <a:chExt cx="0" cy="0"/>
         </a:xfrm>
       </p:grpSpPr>
-      <p:pic>
-        <p:nvPicPr>
-          <p:cNvPr id="2" name="Image 0" descr="/tmp/slide-1787841974973-zt59jt9dlu.png">    </p:cNvPr>
-          <p:cNvPicPr>
-            <a:picLocks noChangeAspect="1"/>
-          </p:cNvPicPr>
-          <p:nvPr/>
-        </p:nvPicPr>
-        <p:blipFill>
-          <a:blip r:embed="rId1"/>
-          <a:stretch>
-            <a:fillRect/>
-          </a:stretch>
-        </p:blipFill>
-        <p:spPr>
-          <a:xfrm>
-            <a:off x="0" y="0"/>
-            <a:ext cx="12188952" cy="6858000"/>
-          </a:xfrm>
-          <a:prstGeom prst="rect">
-            <a:avLst/>
-          </a:prstGeom>
-        </p:spPr>
-      </p:pic>
+      <p:sp>
+        <p:nvSpPr>
+          <p:cNvPr id="2" name="Text 0"/>
+          <p:cNvSpPr/>
+          <p:nvPr/>
+        </p:nvSpPr>
+        <p:spPr>
+          <a:xfrm>
+            <a:off x="677098" y="541734"/>
+            <a:ext cx="4082120" cy="260747"/>
+          </a:xfrm>
+          <a:prstGeom prst="rect">
+            <a:avLst/>
+          </a:prstGeom>
+          <a:noFill/>
+          <a:ln/>
+        </p:spPr>
+        <p:txBody>
+          <a:bodyPr wrap="square" lIns="0" tIns="0" rIns="0" bIns="0" rtlCol="0" anchor="t"/>
+          <a:lstStyle/>
+          <a:p>
+            <a:pPr algn="l" indent="0" marL="0">
+              <a:lnSpc>
+                <a:spcPts val="2053"/>
+              </a:lnSpc>
+              <a:buNone/>
+            </a:pPr>
+            <a:r>
+              <a:rPr lang="en-US" sz="1466" dirty="0">
+                <a:solidFill>
+                  <a:srgbClr val="6B7280"/>
+                </a:solidFill>
+                <a:latin typeface="Inter" pitchFamily="34" charset="0"/>
+                <a:ea typeface="Inter" pitchFamily="34" charset="-122"/>
+                <a:cs typeface="Inter" pitchFamily="34" charset="-120"/>
+              </a:rPr>
+              <a:t>WHAT A GREEN RUN NEVER TOUCHED</a:t>
+            </a:r>
+            <a:endParaRPr lang="en-US" sz="1466" dirty="0"/>
+          </a:p>
+        </p:txBody>
+      </p:sp>
+      <p:sp>
+        <p:nvSpPr>
+          <p:cNvPr id="3" name="Text 1"/>
+          <p:cNvSpPr/>
+          <p:nvPr/>
+        </p:nvSpPr>
+        <p:spPr>
+          <a:xfrm>
+            <a:off x="10646685" y="541734"/>
+            <a:ext cx="882473" cy="260747"/>
+          </a:xfrm>
+          <a:prstGeom prst="rect">
+            <a:avLst/>
+          </a:prstGeom>
+          <a:noFill/>
+          <a:ln/>
+        </p:spPr>
+        <p:txBody>
+          <a:bodyPr wrap="square" lIns="0" tIns="0" rIns="0" bIns="0" rtlCol="0" anchor="t"/>
+          <a:lstStyle/>
+          <a:p>
+            <a:pPr algn="l" indent="0" marL="0">
+              <a:lnSpc>
+                <a:spcPts val="2053"/>
+              </a:lnSpc>
+              <a:buNone/>
+            </a:pPr>
+            <a:r>
+              <a:rPr lang="en-US" sz="1466" dirty="0">
+                <a:solidFill>
+                  <a:srgbClr val="8B7BF0"/>
+                </a:solidFill>
+                <a:latin typeface="JetBrains Mono" pitchFamily="34" charset="0"/>
+                <a:ea typeface="JetBrains Mono" pitchFamily="34" charset="-122"/>
+                <a:cs typeface="JetBrains Mono" pitchFamily="34" charset="-120"/>
+              </a:rPr>
+              <a:t>03 / 05</a:t>
+            </a:r>
+            <a:endParaRPr lang="en-US" sz="1466" dirty="0"/>
+          </a:p>
+        </p:txBody>
+      </p:sp>
+      <p:sp>
+        <p:nvSpPr>
+          <p:cNvPr id="4" name="Text 2"/>
+          <p:cNvSpPr/>
+          <p:nvPr/>
+        </p:nvSpPr>
+        <p:spPr>
+          <a:xfrm>
+            <a:off x="677098" y="971748"/>
+            <a:ext cx="11051451" cy="486767"/>
+          </a:xfrm>
+          <a:prstGeom prst="rect">
+            <a:avLst/>
+          </a:prstGeom>
+          <a:noFill/>
+          <a:ln/>
+        </p:spPr>
+        <p:txBody>
+          <a:bodyPr wrap="square" lIns="0" tIns="0" rIns="0" bIns="0" rtlCol="0" anchor="t"/>
+          <a:lstStyle/>
+          <a:p>
+            <a:pPr algn="l" indent="0" marL="0">
+              <a:lnSpc>
+                <a:spcPts val="3833"/>
+              </a:lnSpc>
+              <a:spcBef>
+                <a:spcPts val="1333"/>
+              </a:spcBef>
+              <a:buNone/>
+            </a:pPr>
+            <a:r>
+              <a:rPr lang="en-US" sz="3066" b="1" dirty="0">
+                <a:solidFill>
+                  <a:srgbClr val="F4F4F5"/>
+                </a:solidFill>
+                <a:latin typeface="Inter" pitchFamily="34" charset="0"/>
+                <a:ea typeface="Inter" pitchFamily="34" charset="-122"/>
+                <a:cs typeface="Inter" pitchFamily="34" charset="-120"/>
+              </a:rPr>
+              <a:t>Four gaps, and what each one hides</a:t>
+            </a:r>
+            <a:endParaRPr lang="en-US" sz="3066" dirty="0"/>
+          </a:p>
+        </p:txBody>
+      </p:sp>
+      <p:sp>
+        <p:nvSpPr>
+          <p:cNvPr id="5" name="Text 3"/>
+          <p:cNvSpPr/>
+          <p:nvPr/>
+        </p:nvSpPr>
+        <p:spPr>
+          <a:xfrm>
+            <a:off x="677098" y="1763316"/>
+            <a:ext cx="5332667" cy="1988741"/>
+          </a:xfrm>
+          <a:prstGeom prst="roundRect">
+            <a:avLst>
+              <a:gd name="adj" fmla="val 3831"/>
+            </a:avLst>
+          </a:prstGeom>
+          <a:noFill/>
+          <a:ln w="12698">
+            <a:solidFill>
+              <a:srgbClr val="26262C"/>
+            </a:solidFill>
+          </a:ln>
+        </p:spPr>
+        <p:txBody>
+          <a:bodyPr wrap="square" rtlCol="0" anchor="ctr"/>
+          <a:lstStyle/>
+          <a:p>
+            <a:pPr indent="0" marL="0">
+              <a:buNone/>
+            </a:pPr>
+            <a:endParaRPr lang="en-US" dirty="0"/>
+          </a:p>
+        </p:txBody>
+      </p:sp>
+      <p:sp>
+        <p:nvSpPr>
+          <p:cNvPr id="6" name="Text 4"/>
+          <p:cNvSpPr/>
+          <p:nvPr/>
+        </p:nvSpPr>
+        <p:spPr>
+          <a:xfrm>
+            <a:off x="926670" y="2051050"/>
+            <a:ext cx="252135" cy="260747"/>
+          </a:xfrm>
+          <a:prstGeom prst="rect">
+            <a:avLst/>
+          </a:prstGeom>
+          <a:noFill/>
+          <a:ln/>
+        </p:spPr>
+        <p:txBody>
+          <a:bodyPr wrap="square" lIns="0" tIns="0" rIns="0" bIns="0" rtlCol="0" anchor="t"/>
+          <a:lstStyle/>
+          <a:p>
+            <a:pPr algn="l" indent="0" marL="0">
+              <a:lnSpc>
+                <a:spcPts val="2053"/>
+              </a:lnSpc>
+              <a:buNone/>
+            </a:pPr>
+            <a:r>
+              <a:rPr lang="en-US" sz="1466" dirty="0">
+                <a:solidFill>
+                  <a:srgbClr val="8B7BF0"/>
+                </a:solidFill>
+                <a:latin typeface="JetBrains Mono" pitchFamily="34" charset="0"/>
+                <a:ea typeface="JetBrains Mono" pitchFamily="34" charset="-122"/>
+                <a:cs typeface="JetBrains Mono" pitchFamily="34" charset="-120"/>
+              </a:rPr>
+              <a:t>01</a:t>
+            </a:r>
+            <a:endParaRPr lang="en-US" sz="1466" dirty="0"/>
+          </a:p>
+        </p:txBody>
+      </p:sp>
+      <p:sp>
+        <p:nvSpPr>
+          <p:cNvPr id="7" name="Text 5"/>
+          <p:cNvSpPr/>
+          <p:nvPr/>
+        </p:nvSpPr>
+        <p:spPr>
+          <a:xfrm>
+            <a:off x="1343086" y="2012950"/>
+            <a:ext cx="543932" cy="308173"/>
+          </a:xfrm>
+          <a:prstGeom prst="rect">
+            <a:avLst/>
+          </a:prstGeom>
+          <a:noFill/>
+          <a:ln/>
+        </p:spPr>
+        <p:txBody>
+          <a:bodyPr wrap="square" lIns="0" tIns="0" rIns="0" bIns="0" rtlCol="0" anchor="t"/>
+          <a:lstStyle/>
+          <a:p>
+            <a:pPr algn="l" indent="0" marL="0">
+              <a:lnSpc>
+                <a:spcPts val="2426"/>
+              </a:lnSpc>
+              <a:buNone/>
+            </a:pPr>
+            <a:r>
+              <a:rPr lang="en-US" sz="1866" b="1" dirty="0">
+                <a:solidFill>
+                  <a:srgbClr val="F4F4F5"/>
+                </a:solidFill>
+                <a:latin typeface="Inter" pitchFamily="34" charset="0"/>
+                <a:ea typeface="Inter" pitchFamily="34" charset="-122"/>
+                <a:cs typeface="Inter" pitchFamily="34" charset="-120"/>
+              </a:rPr>
+              <a:t>Data</a:t>
+            </a:r>
+            <a:endParaRPr lang="en-US" sz="1866" dirty="0"/>
+          </a:p>
+        </p:txBody>
+      </p:sp>
+      <p:sp>
+        <p:nvSpPr>
+          <p:cNvPr id="8" name="Text 6"/>
+          <p:cNvSpPr/>
+          <p:nvPr/>
+        </p:nvSpPr>
+        <p:spPr>
+          <a:xfrm>
+            <a:off x="926670" y="2490391"/>
+            <a:ext cx="4930193" cy="762000"/>
+          </a:xfrm>
+          <a:prstGeom prst="rect">
+            <a:avLst/>
+          </a:prstGeom>
+          <a:noFill/>
+          <a:ln/>
+        </p:spPr>
+        <p:txBody>
+          <a:bodyPr wrap="square" lIns="0" tIns="0" rIns="0" bIns="0" rtlCol="0" anchor="t"/>
+          <a:lstStyle/>
+          <a:p>
+            <a:pPr algn="l" indent="0" marL="0">
+              <a:lnSpc>
+                <a:spcPts val="3000"/>
+              </a:lnSpc>
+              <a:spcBef>
+                <a:spcPts val="1333"/>
+              </a:spcBef>
+              <a:buNone/>
+            </a:pPr>
+            <a:r>
+              <a:rPr lang="en-US" sz="2000" dirty="0">
+                <a:solidFill>
+                  <a:srgbClr val="9CA3AF"/>
+                </a:solidFill>
+                <a:latin typeface="Inter" pitchFamily="34" charset="0"/>
+                <a:ea typeface="Inter" pitchFamily="34" charset="-122"/>
+                <a:cs typeface="Inter" pitchFamily="34" charset="-120"/>
+              </a:rPr>
+              <a:t>Fixtures are small, clean and recent. Your worst row is none of those.</a:t>
+            </a:r>
+            <a:endParaRPr lang="en-US" sz="2000" dirty="0"/>
+          </a:p>
+        </p:txBody>
+      </p:sp>
+      <p:sp>
+        <p:nvSpPr>
+          <p:cNvPr id="9" name="Text 7"/>
+          <p:cNvSpPr/>
+          <p:nvPr/>
+        </p:nvSpPr>
+        <p:spPr>
+          <a:xfrm>
+            <a:off x="6178989" y="1763316"/>
+            <a:ext cx="5332865" cy="1988741"/>
+          </a:xfrm>
+          <a:prstGeom prst="roundRect">
+            <a:avLst>
+              <a:gd name="adj" fmla="val 3831"/>
+            </a:avLst>
+          </a:prstGeom>
+          <a:noFill/>
+          <a:ln w="12698">
+            <a:solidFill>
+              <a:srgbClr val="26262C"/>
+            </a:solidFill>
+          </a:ln>
+        </p:spPr>
+        <p:txBody>
+          <a:bodyPr wrap="square" rtlCol="0" anchor="ctr"/>
+          <a:lstStyle/>
+          <a:p>
+            <a:pPr indent="0" marL="0">
+              <a:buNone/>
+            </a:pPr>
+            <a:endParaRPr lang="en-US" dirty="0"/>
+          </a:p>
+        </p:txBody>
+      </p:sp>
+      <p:sp>
+        <p:nvSpPr>
+          <p:cNvPr id="10" name="Text 8"/>
+          <p:cNvSpPr/>
+          <p:nvPr/>
+        </p:nvSpPr>
+        <p:spPr>
+          <a:xfrm>
+            <a:off x="6428561" y="2051050"/>
+            <a:ext cx="252135" cy="260747"/>
+          </a:xfrm>
+          <a:prstGeom prst="rect">
+            <a:avLst/>
+          </a:prstGeom>
+          <a:noFill/>
+          <a:ln/>
+        </p:spPr>
+        <p:txBody>
+          <a:bodyPr wrap="square" lIns="0" tIns="0" rIns="0" bIns="0" rtlCol="0" anchor="t"/>
+          <a:lstStyle/>
+          <a:p>
+            <a:pPr algn="l" indent="0" marL="0">
+              <a:lnSpc>
+                <a:spcPts val="2053"/>
+              </a:lnSpc>
+              <a:buNone/>
+            </a:pPr>
+            <a:r>
+              <a:rPr lang="en-US" sz="1466" dirty="0">
+                <a:solidFill>
+                  <a:srgbClr val="8B7BF0"/>
+                </a:solidFill>
+                <a:latin typeface="JetBrains Mono" pitchFamily="34" charset="0"/>
+                <a:ea typeface="JetBrains Mono" pitchFamily="34" charset="-122"/>
+                <a:cs typeface="JetBrains Mono" pitchFamily="34" charset="-120"/>
+              </a:rPr>
+              <a:t>02</a:t>
+            </a:r>
+            <a:endParaRPr lang="en-US" sz="1466" dirty="0"/>
+          </a:p>
+        </p:txBody>
+      </p:sp>
+      <p:sp>
+        <p:nvSpPr>
+          <p:cNvPr id="11" name="Text 9"/>
+          <p:cNvSpPr/>
+          <p:nvPr/>
+        </p:nvSpPr>
+        <p:spPr>
+          <a:xfrm>
+            <a:off x="6844977" y="2012950"/>
+            <a:ext cx="1528190" cy="308173"/>
+          </a:xfrm>
+          <a:prstGeom prst="rect">
+            <a:avLst/>
+          </a:prstGeom>
+          <a:noFill/>
+          <a:ln/>
+        </p:spPr>
+        <p:txBody>
+          <a:bodyPr wrap="square" lIns="0" tIns="0" rIns="0" bIns="0" rtlCol="0" anchor="t"/>
+          <a:lstStyle/>
+          <a:p>
+            <a:pPr algn="l" indent="0" marL="0">
+              <a:lnSpc>
+                <a:spcPts val="2426"/>
+              </a:lnSpc>
+              <a:buNone/>
+            </a:pPr>
+            <a:r>
+              <a:rPr lang="en-US" sz="1866" b="1" dirty="0">
+                <a:solidFill>
+                  <a:srgbClr val="F4F4F5"/>
+                </a:solidFill>
+                <a:latin typeface="Inter" pitchFamily="34" charset="0"/>
+                <a:ea typeface="Inter" pitchFamily="34" charset="-122"/>
+                <a:cs typeface="Inter" pitchFamily="34" charset="-120"/>
+              </a:rPr>
+              <a:t>Traffic shape</a:t>
+            </a:r>
+            <a:endParaRPr lang="en-US" sz="1866" dirty="0"/>
+          </a:p>
+        </p:txBody>
+      </p:sp>
+      <p:sp>
+        <p:nvSpPr>
+          <p:cNvPr id="12" name="Text 10"/>
+          <p:cNvSpPr/>
+          <p:nvPr/>
+        </p:nvSpPr>
+        <p:spPr>
+          <a:xfrm>
+            <a:off x="6428561" y="2490391"/>
+            <a:ext cx="4930395" cy="762000"/>
+          </a:xfrm>
+          <a:prstGeom prst="rect">
+            <a:avLst/>
+          </a:prstGeom>
+          <a:noFill/>
+          <a:ln/>
+        </p:spPr>
+        <p:txBody>
+          <a:bodyPr wrap="square" lIns="0" tIns="0" rIns="0" bIns="0" rtlCol="0" anchor="t"/>
+          <a:lstStyle/>
+          <a:p>
+            <a:pPr algn="l" indent="0" marL="0">
+              <a:lnSpc>
+                <a:spcPts val="3000"/>
+              </a:lnSpc>
+              <a:spcBef>
+                <a:spcPts val="1333"/>
+              </a:spcBef>
+              <a:buNone/>
+            </a:pPr>
+            <a:r>
+              <a:rPr lang="en-US" sz="2000" dirty="0">
+                <a:solidFill>
+                  <a:srgbClr val="9CA3AF"/>
+                </a:solidFill>
+                <a:latin typeface="Inter" pitchFamily="34" charset="0"/>
+                <a:ea typeface="Inter" pitchFamily="34" charset="-122"/>
+                <a:cs typeface="Inter" pitchFamily="34" charset="-120"/>
+              </a:rPr>
+              <a:t>Tests arrive one at a time. Production arrives all at once.</a:t>
+            </a:r>
+            <a:endParaRPr lang="en-US" sz="2000" dirty="0"/>
+          </a:p>
+        </p:txBody>
+      </p:sp>
+      <p:sp>
+        <p:nvSpPr>
+          <p:cNvPr id="13" name="Text 11"/>
+          <p:cNvSpPr/>
+          <p:nvPr/>
+        </p:nvSpPr>
+        <p:spPr>
+          <a:xfrm>
+            <a:off x="677098" y="3921323"/>
+            <a:ext cx="5332667" cy="1988741"/>
+          </a:xfrm>
+          <a:prstGeom prst="roundRect">
+            <a:avLst>
+              <a:gd name="adj" fmla="val 3831"/>
+            </a:avLst>
+          </a:prstGeom>
+          <a:noFill/>
+          <a:ln w="12698">
+            <a:solidFill>
+              <a:srgbClr val="26262C"/>
+            </a:solidFill>
+          </a:ln>
+        </p:spPr>
+        <p:txBody>
+          <a:bodyPr wrap="square" rtlCol="0" anchor="ctr"/>
+          <a:lstStyle/>
+          <a:p>
+            <a:pPr indent="0" marL="0">
+              <a:buNone/>
+            </a:pPr>
+            <a:endParaRPr lang="en-US" dirty="0"/>
+          </a:p>
+        </p:txBody>
+      </p:sp>
+      <p:sp>
+        <p:nvSpPr>
+          <p:cNvPr id="14" name="Text 12"/>
+          <p:cNvSpPr/>
+          <p:nvPr/>
+        </p:nvSpPr>
+        <p:spPr>
+          <a:xfrm>
+            <a:off x="926670" y="4209058"/>
+            <a:ext cx="252135" cy="260747"/>
+          </a:xfrm>
+          <a:prstGeom prst="rect">
+            <a:avLst/>
+          </a:prstGeom>
+          <a:noFill/>
+          <a:ln/>
+        </p:spPr>
+        <p:txBody>
+          <a:bodyPr wrap="square" lIns="0" tIns="0" rIns="0" bIns="0" rtlCol="0" anchor="t"/>
+          <a:lstStyle/>
+          <a:p>
+            <a:pPr algn="l" indent="0" marL="0">
+              <a:lnSpc>
+                <a:spcPts val="2053"/>
+              </a:lnSpc>
+              <a:buNone/>
+            </a:pPr>
+            <a:r>
+              <a:rPr lang="en-US" sz="1466" dirty="0">
+                <a:solidFill>
+                  <a:srgbClr val="8B7BF0"/>
+                </a:solidFill>
+                <a:latin typeface="JetBrains Mono" pitchFamily="34" charset="0"/>
+                <a:ea typeface="JetBrains Mono" pitchFamily="34" charset="-122"/>
+                <a:cs typeface="JetBrains Mono" pitchFamily="34" charset="-120"/>
+              </a:rPr>
+              <a:t>03</a:t>
+            </a:r>
+            <a:endParaRPr lang="en-US" sz="1466" dirty="0"/>
+          </a:p>
+        </p:txBody>
+      </p:sp>
+      <p:sp>
+        <p:nvSpPr>
+          <p:cNvPr id="15" name="Text 13"/>
+          <p:cNvSpPr/>
+          <p:nvPr/>
+        </p:nvSpPr>
+        <p:spPr>
+          <a:xfrm>
+            <a:off x="1343086" y="4170958"/>
+            <a:ext cx="2667857" cy="308173"/>
+          </a:xfrm>
+          <a:prstGeom prst="rect">
+            <a:avLst/>
+          </a:prstGeom>
+          <a:noFill/>
+          <a:ln/>
+        </p:spPr>
+        <p:txBody>
+          <a:bodyPr wrap="square" lIns="0" tIns="0" rIns="0" bIns="0" rtlCol="0" anchor="t"/>
+          <a:lstStyle/>
+          <a:p>
+            <a:pPr algn="l" indent="0" marL="0">
+              <a:lnSpc>
+                <a:spcPts val="2426"/>
+              </a:lnSpc>
+              <a:buNone/>
+            </a:pPr>
+            <a:r>
+              <a:rPr lang="en-US" sz="1866" b="1" dirty="0">
+                <a:solidFill>
+                  <a:srgbClr val="F4F4F5"/>
+                </a:solidFill>
+                <a:latin typeface="Inter" pitchFamily="34" charset="0"/>
+                <a:ea typeface="Inter" pitchFamily="34" charset="-122"/>
+                <a:cs typeface="Inter" pitchFamily="34" charset="-120"/>
+              </a:rPr>
+              <a:t>Mocked dependencies</a:t>
+            </a:r>
+            <a:endParaRPr lang="en-US" sz="1866" dirty="0"/>
+          </a:p>
+        </p:txBody>
+      </p:sp>
+      <p:sp>
+        <p:nvSpPr>
+          <p:cNvPr id="16" name="Text 14"/>
+          <p:cNvSpPr/>
+          <p:nvPr/>
+        </p:nvSpPr>
+        <p:spPr>
+          <a:xfrm>
+            <a:off x="926670" y="4648398"/>
+            <a:ext cx="4930193" cy="762000"/>
+          </a:xfrm>
+          <a:prstGeom prst="rect">
+            <a:avLst/>
+          </a:prstGeom>
+          <a:noFill/>
+          <a:ln/>
+        </p:spPr>
+        <p:txBody>
+          <a:bodyPr wrap="square" lIns="0" tIns="0" rIns="0" bIns="0" rtlCol="0" anchor="t"/>
+          <a:lstStyle/>
+          <a:p>
+            <a:pPr algn="l" indent="0" marL="0">
+              <a:lnSpc>
+                <a:spcPts val="3000"/>
+              </a:lnSpc>
+              <a:spcBef>
+                <a:spcPts val="1333"/>
+              </a:spcBef>
+              <a:buNone/>
+            </a:pPr>
+            <a:r>
+              <a:rPr lang="en-US" sz="2000" dirty="0">
+                <a:solidFill>
+                  <a:srgbClr val="9CA3AF"/>
+                </a:solidFill>
+                <a:latin typeface="Inter" pitchFamily="34" charset="0"/>
+                <a:ea typeface="Inter" pitchFamily="34" charset="-122"/>
+                <a:cs typeface="Inter" pitchFamily="34" charset="-120"/>
+              </a:rPr>
+              <a:t>A mock returns what you expected. The real one returns a timeout.</a:t>
+            </a:r>
+            <a:endParaRPr lang="en-US" sz="2000" dirty="0"/>
+          </a:p>
+        </p:txBody>
+      </p:sp>
+      <p:sp>
+        <p:nvSpPr>
+          <p:cNvPr id="17" name="Text 15"/>
+          <p:cNvSpPr/>
+          <p:nvPr/>
+        </p:nvSpPr>
+        <p:spPr>
+          <a:xfrm>
+            <a:off x="6178989" y="3921323"/>
+            <a:ext cx="5332865" cy="1988741"/>
+          </a:xfrm>
+          <a:prstGeom prst="roundRect">
+            <a:avLst>
+              <a:gd name="adj" fmla="val 3831"/>
+            </a:avLst>
+          </a:prstGeom>
+          <a:noFill/>
+          <a:ln w="12698">
+            <a:solidFill>
+              <a:srgbClr val="26262C"/>
+            </a:solidFill>
+          </a:ln>
+        </p:spPr>
+        <p:txBody>
+          <a:bodyPr wrap="square" rtlCol="0" anchor="ctr"/>
+          <a:lstStyle/>
+          <a:p>
+            <a:pPr indent="0" marL="0">
+              <a:buNone/>
+            </a:pPr>
+            <a:endParaRPr lang="en-US" dirty="0"/>
+          </a:p>
+        </p:txBody>
+      </p:sp>
+      <p:sp>
+        <p:nvSpPr>
+          <p:cNvPr id="18" name="Text 16"/>
+          <p:cNvSpPr/>
+          <p:nvPr/>
+        </p:nvSpPr>
+        <p:spPr>
+          <a:xfrm>
+            <a:off x="6428561" y="4209058"/>
+            <a:ext cx="252135" cy="260747"/>
+          </a:xfrm>
+          <a:prstGeom prst="rect">
+            <a:avLst/>
+          </a:prstGeom>
+          <a:noFill/>
+          <a:ln/>
+        </p:spPr>
+        <p:txBody>
+          <a:bodyPr wrap="square" lIns="0" tIns="0" rIns="0" bIns="0" rtlCol="0" anchor="t"/>
+          <a:lstStyle/>
+          <a:p>
+            <a:pPr algn="l" indent="0" marL="0">
+              <a:lnSpc>
+                <a:spcPts val="2053"/>
+              </a:lnSpc>
+              <a:buNone/>
+            </a:pPr>
+            <a:r>
+              <a:rPr lang="en-US" sz="1466" dirty="0">
+                <a:solidFill>
+                  <a:srgbClr val="8B7BF0"/>
+                </a:solidFill>
+                <a:latin typeface="JetBrains Mono" pitchFamily="34" charset="0"/>
+                <a:ea typeface="JetBrains Mono" pitchFamily="34" charset="-122"/>
+                <a:cs typeface="JetBrains Mono" pitchFamily="34" charset="-120"/>
+              </a:rPr>
+              <a:t>04</a:t>
+            </a:r>
+            <a:endParaRPr lang="en-US" sz="1466" dirty="0"/>
+          </a:p>
+        </p:txBody>
+      </p:sp>
+      <p:sp>
+        <p:nvSpPr>
+          <p:cNvPr id="19" name="Text 17"/>
+          <p:cNvSpPr/>
+          <p:nvPr/>
+        </p:nvSpPr>
+        <p:spPr>
+          <a:xfrm>
+            <a:off x="6844977" y="4170958"/>
+            <a:ext cx="2253433" cy="308173"/>
+          </a:xfrm>
+          <a:prstGeom prst="rect">
+            <a:avLst/>
+          </a:prstGeom>
+          <a:noFill/>
+          <a:ln/>
+        </p:spPr>
+        <p:txBody>
+          <a:bodyPr wrap="square" lIns="0" tIns="0" rIns="0" bIns="0" rtlCol="0" anchor="t"/>
+          <a:lstStyle/>
+          <a:p>
+            <a:pPr algn="l" indent="0" marL="0">
+              <a:lnSpc>
+                <a:spcPts val="2426"/>
+              </a:lnSpc>
+              <a:buNone/>
+            </a:pPr>
+            <a:r>
+              <a:rPr lang="en-US" sz="1866" b="1" dirty="0">
+                <a:solidFill>
+                  <a:srgbClr val="F4F4F5"/>
+                </a:solidFill>
+                <a:latin typeface="Inter" pitchFamily="34" charset="0"/>
+                <a:ea typeface="Inter" pitchFamily="34" charset="-122"/>
+                <a:cs typeface="Inter" pitchFamily="34" charset="-120"/>
+              </a:rPr>
+              <a:t>Scale and topology</a:t>
+            </a:r>
+            <a:endParaRPr lang="en-US" sz="1866" dirty="0"/>
+          </a:p>
+        </p:txBody>
+      </p:sp>
+      <p:sp>
+        <p:nvSpPr>
+          <p:cNvPr id="20" name="Text 18"/>
+          <p:cNvSpPr/>
+          <p:nvPr/>
+        </p:nvSpPr>
+        <p:spPr>
+          <a:xfrm>
+            <a:off x="6428561" y="4648398"/>
+            <a:ext cx="4930395" cy="762000"/>
+          </a:xfrm>
+          <a:prstGeom prst="rect">
+            <a:avLst/>
+          </a:prstGeom>
+          <a:noFill/>
+          <a:ln/>
+        </p:spPr>
+        <p:txBody>
+          <a:bodyPr wrap="square" lIns="0" tIns="0" rIns="0" bIns="0" rtlCol="0" anchor="t"/>
+          <a:lstStyle/>
+          <a:p>
+            <a:pPr algn="l" indent="0" marL="0">
+              <a:lnSpc>
+                <a:spcPts val="3000"/>
+              </a:lnSpc>
+              <a:spcBef>
+                <a:spcPts val="1333"/>
+              </a:spcBef>
+              <a:buNone/>
+            </a:pPr>
+            <a:r>
+              <a:rPr lang="en-US" sz="2000" dirty="0">
+                <a:solidFill>
+                  <a:srgbClr val="9CA3AF"/>
+                </a:solidFill>
+                <a:latin typeface="Inter" pitchFamily="34" charset="0"/>
+                <a:ea typeface="Inter" pitchFamily="34" charset="-122"/>
+                <a:cs typeface="Inter" pitchFamily="34" charset="-120"/>
+              </a:rPr>
+              <a:t>One node cannot show what only happens between nodes.</a:t>
+            </a:r>
+            <a:endParaRPr lang="en-US" sz="2000" dirty="0"/>
+          </a:p>
+        </p:txBody>
+      </p:sp>
+      <p:sp>
+        <p:nvSpPr>
+          <p:cNvPr id="21" name="Text 19"/>
+          <p:cNvSpPr/>
+          <p:nvPr/>
+        </p:nvSpPr>
+        <p:spPr>
+          <a:xfrm>
+            <a:off x="460403" y="6079331"/>
+            <a:ext cx="11051451" cy="236934"/>
+          </a:xfrm>
+          <a:prstGeom prst="rect">
+            <a:avLst/>
+          </a:prstGeom>
+          <a:noFill/>
+          <a:ln/>
+        </p:spPr>
+        <p:txBody>
+          <a:bodyPr wrap="square" lIns="0" tIns="0" rIns="0" bIns="0" rtlCol="0" anchor="t"/>
+          <a:lstStyle/>
+          <a:p>
+            <a:pPr algn="r" indent="0" marL="0">
+              <a:lnSpc>
+                <a:spcPts val="1866"/>
+              </a:lnSpc>
+              <a:buNone/>
+            </a:pPr>
+            <a:r>
+              <a:rPr lang="en-US" sz="1333" dirty="0">
+                <a:solidFill>
+                  <a:srgbClr val="6B7280"/>
+                </a:solidFill>
+                <a:latin typeface="Inter" pitchFamily="34" charset="0"/>
+                <a:ea typeface="Inter" pitchFamily="34" charset="-122"/>
+                <a:cs typeface="Inter" pitchFamily="34" charset="-120"/>
+              </a:rPr>
+              <a:t>No figures in this deck — the argument is mechanical, and no gap here can be sized from a source we can cite.</a:t>
+            </a:r>
+            <a:endParaRPr lang="en-US" sz="1333" dirty="0"/>
+          </a:p>
+        </p:txBody>
+      </p:sp>
     </p:spTree>
   </p:cSld>
   <p:clrMapOvr>
@@ -1357,6 +3283,13 @@
 <file path=ppt/slides/slide4.xml><?xml version="1.0" encoding="utf-8"?>
 <p:sld xmlns:a="http://schemas.openxmlformats.org/drawingml/2006/main" xmlns:r="http://schemas.openxmlformats.org/officeDocument/2006/relationships" xmlns:p="http://schemas.openxmlformats.org/presentationml/2006/main">
   <p:cSld name="Slide 4">
+    <p:bg>
+      <p:bgPr>
+        <a:solidFill>
+          <a:srgbClr val="0E0E11"/>
+        </a:solidFill>
+      </p:bgPr>
+    </p:bg>
     <p:spTree>
       <p:nvGrpSpPr>
         <p:cNvPr id="1" name=""/>
@@ -1371,30 +3304,783 @@
           <a:chExt cx="0" cy="0"/>
         </a:xfrm>
       </p:grpSpPr>
-      <p:pic>
-        <p:nvPicPr>
-          <p:cNvPr id="2" name="Image 0" descr="/tmp/slide-1787841975252-5664vn98m3v.png">    </p:cNvPr>
-          <p:cNvPicPr>
-            <a:picLocks noChangeAspect="1"/>
-          </p:cNvPicPr>
-          <p:nvPr/>
-        </p:nvPicPr>
-        <p:blipFill>
-          <a:blip r:embed="rId1"/>
-          <a:stretch>
-            <a:fillRect/>
-          </a:stretch>
-        </p:blipFill>
-        <p:spPr>
-          <a:xfrm>
-            <a:off x="0" y="0"/>
-            <a:ext cx="12188952" cy="6858000"/>
-          </a:xfrm>
-          <a:prstGeom prst="rect">
-            <a:avLst/>
-          </a:prstGeom>
-        </p:spPr>
-      </p:pic>
+      <p:sp>
+        <p:nvSpPr>
+          <p:cNvPr id="2" name="Text 0"/>
+          <p:cNvSpPr/>
+          <p:nvPr/>
+        </p:nvSpPr>
+        <p:spPr>
+          <a:xfrm>
+            <a:off x="677098" y="541734"/>
+            <a:ext cx="1079972" cy="260747"/>
+          </a:xfrm>
+          <a:prstGeom prst="rect">
+            <a:avLst/>
+          </a:prstGeom>
+          <a:noFill/>
+          <a:ln/>
+        </p:spPr>
+        <p:txBody>
+          <a:bodyPr wrap="square" lIns="0" tIns="0" rIns="0" bIns="0" rtlCol="0" anchor="t"/>
+          <a:lstStyle/>
+          <a:p>
+            <a:pPr algn="l" indent="0" marL="0">
+              <a:lnSpc>
+                <a:spcPts val="2053"/>
+              </a:lnSpc>
+              <a:buNone/>
+            </a:pPr>
+            <a:r>
+              <a:rPr lang="en-US" sz="1466" dirty="0">
+                <a:solidFill>
+                  <a:srgbClr val="6B7280"/>
+                </a:solidFill>
+                <a:latin typeface="Inter" pitchFamily="34" charset="0"/>
+                <a:ea typeface="Inter" pitchFamily="34" charset="-122"/>
+                <a:cs typeface="Inter" pitchFamily="34" charset="-120"/>
+              </a:rPr>
+              <a:t>THE FORK</a:t>
+            </a:r>
+            <a:endParaRPr lang="en-US" sz="1466" dirty="0"/>
+          </a:p>
+        </p:txBody>
+      </p:sp>
+      <p:sp>
+        <p:nvSpPr>
+          <p:cNvPr id="3" name="Text 1"/>
+          <p:cNvSpPr/>
+          <p:nvPr/>
+        </p:nvSpPr>
+        <p:spPr>
+          <a:xfrm>
+            <a:off x="10646685" y="541734"/>
+            <a:ext cx="882473" cy="260747"/>
+          </a:xfrm>
+          <a:prstGeom prst="rect">
+            <a:avLst/>
+          </a:prstGeom>
+          <a:noFill/>
+          <a:ln/>
+        </p:spPr>
+        <p:txBody>
+          <a:bodyPr wrap="square" lIns="0" tIns="0" rIns="0" bIns="0" rtlCol="0" anchor="t"/>
+          <a:lstStyle/>
+          <a:p>
+            <a:pPr algn="l" indent="0" marL="0">
+              <a:lnSpc>
+                <a:spcPts val="2053"/>
+              </a:lnSpc>
+              <a:buNone/>
+            </a:pPr>
+            <a:r>
+              <a:rPr lang="en-US" sz="1466" dirty="0">
+                <a:solidFill>
+                  <a:srgbClr val="8B7BF0"/>
+                </a:solidFill>
+                <a:latin typeface="JetBrains Mono" pitchFamily="34" charset="0"/>
+                <a:ea typeface="JetBrains Mono" pitchFamily="34" charset="-122"/>
+                <a:cs typeface="JetBrains Mono" pitchFamily="34" charset="-120"/>
+              </a:rPr>
+              <a:t>04 / 05</a:t>
+            </a:r>
+            <a:endParaRPr lang="en-US" sz="1466" dirty="0"/>
+          </a:p>
+        </p:txBody>
+      </p:sp>
+      <p:sp>
+        <p:nvSpPr>
+          <p:cNvPr id="4" name="Text 2"/>
+          <p:cNvSpPr/>
+          <p:nvPr/>
+        </p:nvSpPr>
+        <p:spPr>
+          <a:xfrm>
+            <a:off x="677098" y="971748"/>
+            <a:ext cx="11051451" cy="486767"/>
+          </a:xfrm>
+          <a:prstGeom prst="rect">
+            <a:avLst/>
+          </a:prstGeom>
+          <a:noFill/>
+          <a:ln/>
+        </p:spPr>
+        <p:txBody>
+          <a:bodyPr wrap="square" lIns="0" tIns="0" rIns="0" bIns="0" rtlCol="0" anchor="t"/>
+          <a:lstStyle/>
+          <a:p>
+            <a:pPr algn="l" indent="0" marL="0">
+              <a:lnSpc>
+                <a:spcPts val="3833"/>
+              </a:lnSpc>
+              <a:spcBef>
+                <a:spcPts val="1333"/>
+              </a:spcBef>
+              <a:buNone/>
+            </a:pPr>
+            <a:r>
+              <a:rPr lang="en-US" sz="3066" b="1" dirty="0">
+                <a:solidFill>
+                  <a:srgbClr val="F4F4F5"/>
+                </a:solidFill>
+                <a:latin typeface="Inter" pitchFamily="34" charset="0"/>
+                <a:ea typeface="Inter" pitchFamily="34" charset="-122"/>
+                <a:cs typeface="Inter" pitchFamily="34" charset="-120"/>
+              </a:rPr>
+              <a:t>Two honest options, and one we keep choosing</a:t>
+            </a:r>
+            <a:endParaRPr lang="en-US" sz="3066" dirty="0"/>
+          </a:p>
+        </p:txBody>
+      </p:sp>
+      <p:sp>
+        <p:nvSpPr>
+          <p:cNvPr id="5" name="Text 3"/>
+          <p:cNvSpPr/>
+          <p:nvPr/>
+        </p:nvSpPr>
+        <p:spPr>
+          <a:xfrm>
+            <a:off x="677098" y="1763316"/>
+            <a:ext cx="5315804" cy="3079948"/>
+          </a:xfrm>
+          <a:prstGeom prst="roundRect">
+            <a:avLst>
+              <a:gd name="adj" fmla="val 2474"/>
+            </a:avLst>
+          </a:prstGeom>
+          <a:noFill/>
+          <a:ln w="12698">
+            <a:solidFill>
+              <a:srgbClr val="26262C"/>
+            </a:solidFill>
+          </a:ln>
+        </p:spPr>
+        <p:txBody>
+          <a:bodyPr wrap="square" rtlCol="0" anchor="ctr"/>
+          <a:lstStyle/>
+          <a:p>
+            <a:pPr indent="0" marL="0">
+              <a:buNone/>
+            </a:pPr>
+            <a:endParaRPr lang="en-US" dirty="0"/>
+          </a:p>
+        </p:txBody>
+      </p:sp>
+      <p:sp>
+        <p:nvSpPr>
+          <p:cNvPr id="6" name="Text 4"/>
+          <p:cNvSpPr/>
+          <p:nvPr/>
+        </p:nvSpPr>
+        <p:spPr>
+          <a:xfrm>
+            <a:off x="926670" y="2012950"/>
+            <a:ext cx="4912993" cy="396081"/>
+          </a:xfrm>
+          <a:prstGeom prst="rect">
+            <a:avLst/>
+          </a:prstGeom>
+          <a:noFill/>
+          <a:ln/>
+        </p:spPr>
+        <p:txBody>
+          <a:bodyPr wrap="square" lIns="0" tIns="0" rIns="0" bIns="0" rtlCol="0" anchor="t"/>
+          <a:lstStyle/>
+          <a:p>
+            <a:pPr algn="l" indent="0" marL="0">
+              <a:lnSpc>
+                <a:spcPts val="3120"/>
+              </a:lnSpc>
+              <a:buNone/>
+            </a:pPr>
+            <a:r>
+              <a:rPr lang="en-US" sz="2400" b="1" dirty="0">
+                <a:solidFill>
+                  <a:srgbClr val="F4F4F5"/>
+                </a:solidFill>
+                <a:latin typeface="Inter" pitchFamily="34" charset="0"/>
+                <a:ea typeface="Inter" pitchFamily="34" charset="-122"/>
+                <a:cs typeface="Inter" pitchFamily="34" charset="-120"/>
+              </a:rPr>
+              <a:t>Close the gap</a:t>
+            </a:r>
+            <a:endParaRPr lang="en-US" sz="2400" dirty="0"/>
+          </a:p>
+        </p:txBody>
+      </p:sp>
+      <p:sp>
+        <p:nvSpPr>
+          <p:cNvPr id="7" name="Text 5"/>
+          <p:cNvSpPr/>
+          <p:nvPr/>
+        </p:nvSpPr>
+        <p:spPr>
+          <a:xfrm>
+            <a:off x="926670" y="2476698"/>
+            <a:ext cx="4912993" cy="343694"/>
+          </a:xfrm>
+          <a:prstGeom prst="rect">
+            <a:avLst/>
+          </a:prstGeom>
+          <a:noFill/>
+          <a:ln/>
+        </p:spPr>
+        <p:txBody>
+          <a:bodyPr wrap="square" lIns="0" tIns="0" rIns="0" bIns="0" rtlCol="0" anchor="t"/>
+          <a:lstStyle/>
+          <a:p>
+            <a:pPr algn="l" indent="0" marL="0">
+              <a:lnSpc>
+                <a:spcPts val="2706"/>
+              </a:lnSpc>
+              <a:spcBef>
+                <a:spcPts val="533"/>
+              </a:spcBef>
+              <a:buNone/>
+            </a:pPr>
+            <a:r>
+              <a:rPr lang="en-US" sz="1866" dirty="0">
+                <a:solidFill>
+                  <a:srgbClr val="9CA3AF"/>
+                </a:solidFill>
+                <a:latin typeface="Inter" pitchFamily="34" charset="0"/>
+                <a:ea typeface="Inter" pitchFamily="34" charset="-122"/>
+                <a:cs typeface="Inter" pitchFamily="34" charset="-120"/>
+              </a:rPr>
+              <a:t>Price: a second production, fully staffed.</a:t>
+            </a:r>
+            <a:endParaRPr lang="en-US" sz="1866" dirty="0"/>
+          </a:p>
+        </p:txBody>
+      </p:sp>
+      <p:sp>
+        <p:nvSpPr>
+          <p:cNvPr id="8" name="Text 6"/>
+          <p:cNvSpPr/>
+          <p:nvPr/>
+        </p:nvSpPr>
+        <p:spPr>
+          <a:xfrm>
+            <a:off x="926670" y="2989659"/>
+            <a:ext cx="4816660" cy="12700"/>
+          </a:xfrm>
+          <a:prstGeom prst="rect">
+            <a:avLst/>
+          </a:prstGeom>
+          <a:solidFill>
+            <a:srgbClr val="2E2E36"/>
+          </a:solidFill>
+          <a:ln/>
+        </p:spPr>
+        <p:txBody>
+          <a:bodyPr wrap="square" rtlCol="0" anchor="ctr"/>
+          <a:lstStyle/>
+          <a:p>
+            <a:pPr indent="0" marL="0">
+              <a:buNone/>
+            </a:pPr>
+            <a:endParaRPr lang="en-US" dirty="0"/>
+          </a:p>
+        </p:txBody>
+      </p:sp>
+      <p:sp>
+        <p:nvSpPr>
+          <p:cNvPr id="9" name="Text 7"/>
+          <p:cNvSpPr/>
+          <p:nvPr/>
+        </p:nvSpPr>
+        <p:spPr>
+          <a:xfrm>
+            <a:off x="926670" y="3205559"/>
+            <a:ext cx="4816660" cy="1301750"/>
+          </a:xfrm>
+          <a:prstGeom prst="rect">
+            <a:avLst/>
+          </a:prstGeom>
+          <a:noFill/>
+          <a:ln/>
+        </p:spPr>
+        <p:txBody>
+          <a:bodyPr wrap="square" lIns="0" tIns="0" rIns="0" bIns="0" rtlCol="0" anchor="t"/>
+          <a:lstStyle/>
+          <a:p>
+            <a:pPr algn="l" marL="342900" indent="-342900">
+              <a:lnSpc>
+                <a:spcPts val="2706"/>
+              </a:lnSpc>
+              <a:buSzPct val="100000"/>
+              <a:buChar char="•"/>
+            </a:pPr>
+            <a:r>
+              <a:rPr lang="en-US" sz="1866" dirty="0">
+                <a:solidFill>
+                  <a:srgbClr val="9CA3AF"/>
+                </a:solidFill>
+                <a:latin typeface="Inter" pitchFamily="34" charset="0"/>
+                <a:ea typeface="Inter" pitchFamily="34" charset="-122"/>
+                <a:cs typeface="Inter" pitchFamily="34" charset="-120"/>
+              </a:rPr>
+              <a:t>Production-shaped data, refreshed</a:t>
+            </a:r>
+            <a:endParaRPr lang="en-US" sz="1866" dirty="0"/>
+          </a:p>
+          <a:p>
+            <a:pPr algn="l" marL="342900" indent="-342900">
+              <a:lnSpc>
+                <a:spcPts val="2706"/>
+              </a:lnSpc>
+              <a:buSzPct val="100000"/>
+              <a:buChar char="•"/>
+            </a:pPr>
+            <a:r>
+              <a:rPr lang="en-US" sz="1866" dirty="0">
+                <a:solidFill>
+                  <a:srgbClr val="9CA3AF"/>
+                </a:solidFill>
+                <a:latin typeface="Inter" pitchFamily="34" charset="0"/>
+                <a:ea typeface="Inter" pitchFamily="34" charset="-122"/>
+                <a:cs typeface="Inter" pitchFamily="34" charset="-120"/>
+              </a:rPr>
+              <a:t>Real dependencies, not mocks</a:t>
+            </a:r>
+            <a:endParaRPr lang="en-US" sz="1866" dirty="0"/>
+          </a:p>
+          <a:p>
+            <a:pPr algn="l" marL="342900" indent="-342900">
+              <a:lnSpc>
+                <a:spcPts val="2706"/>
+              </a:lnSpc>
+              <a:buSzPct val="100000"/>
+              <a:buChar char="•"/>
+            </a:pPr>
+            <a:r>
+              <a:rPr lang="en-US" sz="1866" dirty="0">
+                <a:solidFill>
+                  <a:srgbClr val="9CA3AF"/>
+                </a:solidFill>
+                <a:latin typeface="Inter" pitchFamily="34" charset="0"/>
+                <a:ea typeface="Inter" pitchFamily="34" charset="-122"/>
+                <a:cs typeface="Inter" pitchFamily="34" charset="-120"/>
+              </a:rPr>
+              <a:t>Load and topology that match</a:t>
+            </a:r>
+            <a:endParaRPr lang="en-US" sz="1866" dirty="0"/>
+          </a:p>
+        </p:txBody>
+      </p:sp>
+      <p:sp>
+        <p:nvSpPr>
+          <p:cNvPr id="10" name="Text 8"/>
+          <p:cNvSpPr/>
+          <p:nvPr/>
+        </p:nvSpPr>
+        <p:spPr>
+          <a:xfrm>
+            <a:off x="6196051" y="1763316"/>
+            <a:ext cx="5315804" cy="3079948"/>
+          </a:xfrm>
+          <a:prstGeom prst="roundRect">
+            <a:avLst>
+              <a:gd name="adj" fmla="val 2474"/>
+            </a:avLst>
+          </a:prstGeom>
+          <a:noFill/>
+          <a:ln w="12698">
+            <a:solidFill>
+              <a:srgbClr val="26262C"/>
+            </a:solidFill>
+          </a:ln>
+        </p:spPr>
+        <p:txBody>
+          <a:bodyPr wrap="square" rtlCol="0" anchor="ctr"/>
+          <a:lstStyle/>
+          <a:p>
+            <a:pPr indent="0" marL="0">
+              <a:buNone/>
+            </a:pPr>
+            <a:endParaRPr lang="en-US" dirty="0"/>
+          </a:p>
+        </p:txBody>
+      </p:sp>
+      <p:sp>
+        <p:nvSpPr>
+          <p:cNvPr id="11" name="Text 9"/>
+          <p:cNvSpPr/>
+          <p:nvPr/>
+        </p:nvSpPr>
+        <p:spPr>
+          <a:xfrm>
+            <a:off x="6445623" y="2012950"/>
+            <a:ext cx="4912993" cy="396081"/>
+          </a:xfrm>
+          <a:prstGeom prst="rect">
+            <a:avLst/>
+          </a:prstGeom>
+          <a:noFill/>
+          <a:ln/>
+        </p:spPr>
+        <p:txBody>
+          <a:bodyPr wrap="square" lIns="0" tIns="0" rIns="0" bIns="0" rtlCol="0" anchor="t"/>
+          <a:lstStyle/>
+          <a:p>
+            <a:pPr algn="l" indent="0" marL="0">
+              <a:lnSpc>
+                <a:spcPts val="3120"/>
+              </a:lnSpc>
+              <a:buNone/>
+            </a:pPr>
+            <a:r>
+              <a:rPr lang="en-US" sz="2400" b="1" dirty="0">
+                <a:solidFill>
+                  <a:srgbClr val="F4F4F5"/>
+                </a:solidFill>
+                <a:latin typeface="Inter" pitchFamily="34" charset="0"/>
+                <a:ea typeface="Inter" pitchFamily="34" charset="-122"/>
+                <a:cs typeface="Inter" pitchFamily="34" charset="-120"/>
+              </a:rPr>
+              <a:t>Shrink staging</a:t>
+            </a:r>
+            <a:endParaRPr lang="en-US" sz="2400" dirty="0"/>
+          </a:p>
+        </p:txBody>
+      </p:sp>
+      <p:sp>
+        <p:nvSpPr>
+          <p:cNvPr id="12" name="Text 10"/>
+          <p:cNvSpPr/>
+          <p:nvPr/>
+        </p:nvSpPr>
+        <p:spPr>
+          <a:xfrm>
+            <a:off x="6445623" y="2476698"/>
+            <a:ext cx="4912993" cy="343694"/>
+          </a:xfrm>
+          <a:prstGeom prst="rect">
+            <a:avLst/>
+          </a:prstGeom>
+          <a:noFill/>
+          <a:ln/>
+        </p:spPr>
+        <p:txBody>
+          <a:bodyPr wrap="square" lIns="0" tIns="0" rIns="0" bIns="0" rtlCol="0" anchor="t"/>
+          <a:lstStyle/>
+          <a:p>
+            <a:pPr algn="l" indent="0" marL="0">
+              <a:lnSpc>
+                <a:spcPts val="2706"/>
+              </a:lnSpc>
+              <a:spcBef>
+                <a:spcPts val="533"/>
+              </a:spcBef>
+              <a:buNone/>
+            </a:pPr>
+            <a:r>
+              <a:rPr lang="en-US" sz="1866" dirty="0">
+                <a:solidFill>
+                  <a:srgbClr val="9CA3AF"/>
+                </a:solidFill>
+                <a:latin typeface="Inter" pitchFamily="34" charset="0"/>
+                <a:ea typeface="Inter" pitchFamily="34" charset="-122"/>
+                <a:cs typeface="Inter" pitchFamily="34" charset="-120"/>
+              </a:rPr>
+              <a:t>Price: production tooling we do not have.</a:t>
+            </a:r>
+            <a:endParaRPr lang="en-US" sz="1866" dirty="0"/>
+          </a:p>
+        </p:txBody>
+      </p:sp>
+      <p:sp>
+        <p:nvSpPr>
+          <p:cNvPr id="13" name="Text 11"/>
+          <p:cNvSpPr/>
+          <p:nvPr/>
+        </p:nvSpPr>
+        <p:spPr>
+          <a:xfrm>
+            <a:off x="6445623" y="2989659"/>
+            <a:ext cx="4816660" cy="12700"/>
+          </a:xfrm>
+          <a:prstGeom prst="rect">
+            <a:avLst/>
+          </a:prstGeom>
+          <a:solidFill>
+            <a:srgbClr val="2E2E36"/>
+          </a:solidFill>
+          <a:ln/>
+        </p:spPr>
+        <p:txBody>
+          <a:bodyPr wrap="square" rtlCol="0" anchor="ctr"/>
+          <a:lstStyle/>
+          <a:p>
+            <a:pPr indent="0" marL="0">
+              <a:buNone/>
+            </a:pPr>
+            <a:endParaRPr lang="en-US" dirty="0"/>
+          </a:p>
+        </p:txBody>
+      </p:sp>
+      <p:sp>
+        <p:nvSpPr>
+          <p:cNvPr id="14" name="Text 12"/>
+          <p:cNvSpPr/>
+          <p:nvPr/>
+        </p:nvSpPr>
+        <p:spPr>
+          <a:xfrm>
+            <a:off x="6445623" y="3205559"/>
+            <a:ext cx="4816660" cy="1301750"/>
+          </a:xfrm>
+          <a:prstGeom prst="rect">
+            <a:avLst/>
+          </a:prstGeom>
+          <a:noFill/>
+          <a:ln/>
+        </p:spPr>
+        <p:txBody>
+          <a:bodyPr wrap="square" lIns="0" tIns="0" rIns="0" bIns="0" rtlCol="0" anchor="t"/>
+          <a:lstStyle/>
+          <a:p>
+            <a:pPr algn="l" marL="342900" indent="-342900">
+              <a:lnSpc>
+                <a:spcPts val="2706"/>
+              </a:lnSpc>
+              <a:buSzPct val="100000"/>
+              <a:buChar char="•"/>
+            </a:pPr>
+            <a:r>
+              <a:rPr lang="en-US" sz="1866" dirty="0">
+                <a:solidFill>
+                  <a:srgbClr val="9CA3AF"/>
+                </a:solidFill>
+                <a:latin typeface="Inter" pitchFamily="34" charset="0"/>
+                <a:ea typeface="Inter" pitchFamily="34" charset="-122"/>
+                <a:cs typeface="Inter" pitchFamily="34" charset="-120"/>
+              </a:rPr>
+              <a:t>Boot and wiring proved, nothing more</a:t>
+            </a:r>
+            <a:endParaRPr lang="en-US" sz="1866" dirty="0"/>
+          </a:p>
+          <a:p>
+            <a:pPr algn="l" marL="342900" indent="-342900">
+              <a:lnSpc>
+                <a:spcPts val="2706"/>
+              </a:lnSpc>
+              <a:buSzPct val="100000"/>
+              <a:buChar char="•"/>
+            </a:pPr>
+            <a:r>
+              <a:rPr lang="en-US" sz="1866" dirty="0">
+                <a:solidFill>
+                  <a:srgbClr val="9CA3AF"/>
+                </a:solidFill>
+                <a:latin typeface="Inter" pitchFamily="34" charset="0"/>
+                <a:ea typeface="Inter" pitchFamily="34" charset="-122"/>
+                <a:cs typeface="Inter" pitchFamily="34" charset="-120"/>
+              </a:rPr>
+              <a:t>Correctness moves behind flags</a:t>
+            </a:r>
+            <a:endParaRPr lang="en-US" sz="1866" dirty="0"/>
+          </a:p>
+          <a:p>
+            <a:pPr algn="l" marL="342900" indent="-342900">
+              <a:lnSpc>
+                <a:spcPts val="2706"/>
+              </a:lnSpc>
+              <a:buSzPct val="100000"/>
+              <a:buChar char="•"/>
+            </a:pPr>
+            <a:r>
+              <a:rPr lang="en-US" sz="1866" dirty="0">
+                <a:solidFill>
+                  <a:srgbClr val="9CA3AF"/>
+                </a:solidFill>
+                <a:latin typeface="Inter" pitchFamily="34" charset="0"/>
+                <a:ea typeface="Inter" pitchFamily="34" charset="-122"/>
+                <a:cs typeface="Inter" pitchFamily="34" charset="-120"/>
+              </a:rPr>
+              <a:t>Canaries and fast rollback carry it</a:t>
+            </a:r>
+            <a:endParaRPr lang="en-US" sz="1866" dirty="0"/>
+          </a:p>
+        </p:txBody>
+      </p:sp>
+      <p:sp>
+        <p:nvSpPr>
+          <p:cNvPr id="15" name="Shape 13"/>
+          <p:cNvSpPr/>
+          <p:nvPr/>
+        </p:nvSpPr>
+        <p:spPr>
+          <a:xfrm>
+            <a:off x="677098" y="5052814"/>
+            <a:ext cx="10834756" cy="0"/>
+          </a:xfrm>
+          <a:prstGeom prst="line">
+            <a:avLst/>
+          </a:prstGeom>
+          <a:noFill/>
+          <a:ln w="12698">
+            <a:solidFill>
+              <a:srgbClr val="26262C"/>
+            </a:solidFill>
+            <a:prstDash val="solid"/>
+          </a:ln>
+        </p:spPr>
+      </p:sp>
+      <p:sp>
+        <p:nvSpPr>
+          <p:cNvPr id="16" name="Shape 14"/>
+          <p:cNvSpPr/>
+          <p:nvPr/>
+        </p:nvSpPr>
+        <p:spPr>
+          <a:xfrm>
+            <a:off x="11505506" y="5046464"/>
+            <a:ext cx="0" cy="863600"/>
+          </a:xfrm>
+          <a:prstGeom prst="line">
+            <a:avLst/>
+          </a:prstGeom>
+          <a:noFill/>
+          <a:ln w="12698">
+            <a:solidFill>
+              <a:srgbClr val="26262C"/>
+            </a:solidFill>
+            <a:prstDash val="solid"/>
+          </a:ln>
+        </p:spPr>
+      </p:sp>
+      <p:sp>
+        <p:nvSpPr>
+          <p:cNvPr id="17" name="Shape 15"/>
+          <p:cNvSpPr/>
+          <p:nvPr/>
+        </p:nvSpPr>
+        <p:spPr>
+          <a:xfrm>
+            <a:off x="677098" y="5903714"/>
+            <a:ext cx="10834756" cy="0"/>
+          </a:xfrm>
+          <a:prstGeom prst="line">
+            <a:avLst/>
+          </a:prstGeom>
+          <a:noFill/>
+          <a:ln w="12698">
+            <a:solidFill>
+              <a:srgbClr val="26262C"/>
+            </a:solidFill>
+            <a:prstDash val="solid"/>
+          </a:ln>
+        </p:spPr>
+      </p:sp>
+      <p:sp>
+        <p:nvSpPr>
+          <p:cNvPr id="18" name="Shape 16"/>
+          <p:cNvSpPr/>
+          <p:nvPr/>
+        </p:nvSpPr>
+        <p:spPr>
+          <a:xfrm>
+            <a:off x="689795" y="5046464"/>
+            <a:ext cx="0" cy="863600"/>
+          </a:xfrm>
+          <a:prstGeom prst="line">
+            <a:avLst/>
+          </a:prstGeom>
+          <a:noFill/>
+          <a:ln w="25397">
+            <a:solidFill>
+              <a:srgbClr val="8B7BF0"/>
+            </a:solidFill>
+            <a:prstDash val="solid"/>
+          </a:ln>
+        </p:spPr>
+      </p:sp>
+      <p:sp>
+        <p:nvSpPr>
+          <p:cNvPr id="19" name="Text 17"/>
+          <p:cNvSpPr/>
+          <p:nvPr/>
+        </p:nvSpPr>
+        <p:spPr>
+          <a:xfrm>
+            <a:off x="939367" y="5262364"/>
+            <a:ext cx="10529374" cy="431800"/>
+          </a:xfrm>
+          <a:prstGeom prst="rect">
+            <a:avLst/>
+          </a:prstGeom>
+          <a:noFill/>
+          <a:ln/>
+        </p:spPr>
+        <p:txBody>
+          <a:bodyPr wrap="square" lIns="0" tIns="0" rIns="0" bIns="0" rtlCol="0" anchor="t"/>
+          <a:lstStyle/>
+          <a:p>
+            <a:pPr algn="l" indent="0" marL="0">
+              <a:lnSpc>
+                <a:spcPts val="3400"/>
+              </a:lnSpc>
+              <a:buNone/>
+            </a:pPr>
+            <a:r>
+              <a:rPr lang="en-US" sz="2266" dirty="0">
+                <a:solidFill>
+                  <a:srgbClr val="F4F4F5"/>
+                </a:solidFill>
+                <a:latin typeface="Inter" pitchFamily="34" charset="0"/>
+                <a:ea typeface="Inter" pitchFamily="34" charset="-122"/>
+                <a:cs typeface="Inter" pitchFamily="34" charset="-120"/>
+              </a:rPr>
+              <a:t>Both are honest. Keeping the gap and keeping the claim is not.</a:t>
+            </a:r>
+            <a:endParaRPr lang="en-US" sz="2266" dirty="0"/>
+          </a:p>
+        </p:txBody>
+      </p:sp>
+      <p:sp>
+        <p:nvSpPr>
+          <p:cNvPr id="20" name="Text 18"/>
+          <p:cNvSpPr/>
+          <p:nvPr/>
+        </p:nvSpPr>
+        <p:spPr>
+          <a:xfrm>
+            <a:off x="460403" y="6079331"/>
+            <a:ext cx="11051451" cy="236934"/>
+          </a:xfrm>
+          <a:prstGeom prst="rect">
+            <a:avLst/>
+          </a:prstGeom>
+          <a:noFill/>
+          <a:ln/>
+        </p:spPr>
+        <p:txBody>
+          <a:bodyPr wrap="square" lIns="0" tIns="0" rIns="0" bIns="0" rtlCol="0" anchor="t"/>
+          <a:lstStyle/>
+          <a:p>
+            <a:pPr algn="r" indent="0" marL="0">
+              <a:lnSpc>
+                <a:spcPts val="1866"/>
+              </a:lnSpc>
+              <a:buNone/>
+            </a:pPr>
+            <a:r>
+              <a:rPr lang="en-US" sz="1333" dirty="0">
+                <a:solidFill>
+                  <a:srgbClr val="6B7280"/>
+                </a:solidFill>
+                <a:latin typeface="Inter" pitchFamily="34" charset="0"/>
+                <a:ea typeface="Inter" pitchFamily="34" charset="-122"/>
+                <a:cs typeface="Inter" pitchFamily="34" charset="-120"/>
+              </a:rPr>
+              <a:t>No figures in this deck — the argument is mechanical, and no gap here can be sized from a source we can cite.</a:t>
+            </a:r>
+            <a:endParaRPr lang="en-US" sz="1333" dirty="0"/>
+          </a:p>
+        </p:txBody>
+      </p:sp>
     </p:spTree>
   </p:cSld>
   <p:clrMapOvr>
@@ -1406,6 +4092,13 @@
 <file path=ppt/slides/slide5.xml><?xml version="1.0" encoding="utf-8"?>
 <p:sld xmlns:a="http://schemas.openxmlformats.org/drawingml/2006/main" xmlns:r="http://schemas.openxmlformats.org/officeDocument/2006/relationships" xmlns:p="http://schemas.openxmlformats.org/presentationml/2006/main">
   <p:cSld name="Slide 5">
+    <p:bg>
+      <p:bgPr>
+        <a:solidFill>
+          <a:srgbClr val="0E0E11"/>
+        </a:solidFill>
+      </p:bgPr>
+    </p:bg>
     <p:spTree>
       <p:nvGrpSpPr>
         <p:cNvPr id="1" name=""/>
@@ -1420,30 +4113,698 @@
           <a:chExt cx="0" cy="0"/>
         </a:xfrm>
       </p:grpSpPr>
-      <p:pic>
-        <p:nvPicPr>
-          <p:cNvPr id="2" name="Image 0" descr="/tmp/slide-1787841975520-hlcewq11e8.png">    </p:cNvPr>
-          <p:cNvPicPr>
-            <a:picLocks noChangeAspect="1"/>
-          </p:cNvPicPr>
-          <p:nvPr/>
-        </p:nvPicPr>
-        <p:blipFill>
-          <a:blip r:embed="rId1"/>
-          <a:stretch>
-            <a:fillRect/>
-          </a:stretch>
-        </p:blipFill>
-        <p:spPr>
-          <a:xfrm>
-            <a:off x="0" y="0"/>
-            <a:ext cx="12188952" cy="6858000"/>
-          </a:xfrm>
-          <a:prstGeom prst="rect">
-            <a:avLst/>
-          </a:prstGeom>
-        </p:spPr>
-      </p:pic>
+      <p:sp>
+        <p:nvSpPr>
+          <p:cNvPr id="2" name="Text 0"/>
+          <p:cNvSpPr/>
+          <p:nvPr/>
+        </p:nvSpPr>
+        <p:spPr>
+          <a:xfrm>
+            <a:off x="677098" y="541734"/>
+            <a:ext cx="1159903" cy="260747"/>
+          </a:xfrm>
+          <a:prstGeom prst="rect">
+            <a:avLst/>
+          </a:prstGeom>
+          <a:noFill/>
+          <a:ln/>
+        </p:spPr>
+        <p:txBody>
+          <a:bodyPr wrap="square" lIns="0" tIns="0" rIns="0" bIns="0" rtlCol="0" anchor="t"/>
+          <a:lstStyle/>
+          <a:p>
+            <a:pPr algn="l" indent="0" marL="0">
+              <a:lnSpc>
+                <a:spcPts val="2053"/>
+              </a:lnSpc>
+              <a:buNone/>
+            </a:pPr>
+            <a:r>
+              <a:rPr lang="en-US" sz="1466" dirty="0">
+                <a:solidFill>
+                  <a:srgbClr val="6B7280"/>
+                </a:solidFill>
+                <a:latin typeface="Inter" pitchFamily="34" charset="0"/>
+                <a:ea typeface="Inter" pitchFamily="34" charset="-122"/>
+                <a:cs typeface="Inter" pitchFamily="34" charset="-120"/>
+              </a:rPr>
+              <a:t>DECISIONS</a:t>
+            </a:r>
+            <a:endParaRPr lang="en-US" sz="1466" dirty="0"/>
+          </a:p>
+        </p:txBody>
+      </p:sp>
+      <p:sp>
+        <p:nvSpPr>
+          <p:cNvPr id="3" name="Text 1"/>
+          <p:cNvSpPr/>
+          <p:nvPr/>
+        </p:nvSpPr>
+        <p:spPr>
+          <a:xfrm>
+            <a:off x="10646685" y="541734"/>
+            <a:ext cx="882473" cy="260747"/>
+          </a:xfrm>
+          <a:prstGeom prst="rect">
+            <a:avLst/>
+          </a:prstGeom>
+          <a:noFill/>
+          <a:ln/>
+        </p:spPr>
+        <p:txBody>
+          <a:bodyPr wrap="square" lIns="0" tIns="0" rIns="0" bIns="0" rtlCol="0" anchor="t"/>
+          <a:lstStyle/>
+          <a:p>
+            <a:pPr algn="l" indent="0" marL="0">
+              <a:lnSpc>
+                <a:spcPts val="2053"/>
+              </a:lnSpc>
+              <a:buNone/>
+            </a:pPr>
+            <a:r>
+              <a:rPr lang="en-US" sz="1466" dirty="0">
+                <a:solidFill>
+                  <a:srgbClr val="8B7BF0"/>
+                </a:solidFill>
+                <a:latin typeface="JetBrains Mono" pitchFamily="34" charset="0"/>
+                <a:ea typeface="JetBrains Mono" pitchFamily="34" charset="-122"/>
+                <a:cs typeface="JetBrains Mono" pitchFamily="34" charset="-120"/>
+              </a:rPr>
+              <a:t>05 / 05</a:t>
+            </a:r>
+            <a:endParaRPr lang="en-US" sz="1466" dirty="0"/>
+          </a:p>
+        </p:txBody>
+      </p:sp>
+      <p:sp>
+        <p:nvSpPr>
+          <p:cNvPr id="4" name="Text 2"/>
+          <p:cNvSpPr/>
+          <p:nvPr/>
+        </p:nvSpPr>
+        <p:spPr>
+          <a:xfrm>
+            <a:off x="677098" y="971748"/>
+            <a:ext cx="11051451" cy="486767"/>
+          </a:xfrm>
+          <a:prstGeom prst="rect">
+            <a:avLst/>
+          </a:prstGeom>
+          <a:noFill/>
+          <a:ln/>
+        </p:spPr>
+        <p:txBody>
+          <a:bodyPr wrap="square" lIns="0" tIns="0" rIns="0" bIns="0" rtlCol="0" anchor="t"/>
+          <a:lstStyle/>
+          <a:p>
+            <a:pPr algn="l" indent="0" marL="0">
+              <a:lnSpc>
+                <a:spcPts val="3833"/>
+              </a:lnSpc>
+              <a:spcBef>
+                <a:spcPts val="1333"/>
+              </a:spcBef>
+              <a:buNone/>
+            </a:pPr>
+            <a:r>
+              <a:rPr lang="en-US" sz="3066" b="1" dirty="0">
+                <a:solidFill>
+                  <a:srgbClr val="F4F4F5"/>
+                </a:solidFill>
+                <a:latin typeface="Inter" pitchFamily="34" charset="0"/>
+                <a:ea typeface="Inter" pitchFamily="34" charset="-122"/>
+                <a:cs typeface="Inter" pitchFamily="34" charset="-120"/>
+              </a:rPr>
+              <a:t>What we need to decide</a:t>
+            </a:r>
+            <a:endParaRPr lang="en-US" sz="3066" dirty="0"/>
+          </a:p>
+        </p:txBody>
+      </p:sp>
+      <p:sp>
+        <p:nvSpPr>
+          <p:cNvPr id="5" name="Text 3"/>
+          <p:cNvSpPr/>
+          <p:nvPr/>
+        </p:nvSpPr>
+        <p:spPr>
+          <a:xfrm>
+            <a:off x="677098" y="1852216"/>
+            <a:ext cx="345219" cy="260747"/>
+          </a:xfrm>
+          <a:prstGeom prst="rect">
+            <a:avLst/>
+          </a:prstGeom>
+          <a:noFill/>
+          <a:ln/>
+        </p:spPr>
+        <p:txBody>
+          <a:bodyPr wrap="square" lIns="0" tIns="0" rIns="0" bIns="0" rtlCol="0" anchor="t"/>
+          <a:lstStyle/>
+          <a:p>
+            <a:pPr algn="l" indent="0" marL="0">
+              <a:lnSpc>
+                <a:spcPts val="2053"/>
+              </a:lnSpc>
+              <a:buNone/>
+            </a:pPr>
+            <a:r>
+              <a:rPr lang="en-US" sz="1466" dirty="0">
+                <a:solidFill>
+                  <a:srgbClr val="8B7BF0"/>
+                </a:solidFill>
+                <a:latin typeface="JetBrains Mono" pitchFamily="34" charset="0"/>
+                <a:ea typeface="JetBrains Mono" pitchFamily="34" charset="-122"/>
+                <a:cs typeface="JetBrains Mono" pitchFamily="34" charset="-120"/>
+              </a:rPr>
+              <a:t>01</a:t>
+            </a:r>
+            <a:endParaRPr lang="en-US" sz="1466" dirty="0"/>
+          </a:p>
+        </p:txBody>
+      </p:sp>
+      <p:sp>
+        <p:nvSpPr>
+          <p:cNvPr id="6" name="Text 4"/>
+          <p:cNvSpPr/>
+          <p:nvPr/>
+        </p:nvSpPr>
+        <p:spPr>
+          <a:xfrm>
+            <a:off x="1252423" y="1763316"/>
+            <a:ext cx="6281119" cy="365522"/>
+          </a:xfrm>
+          <a:prstGeom prst="rect">
+            <a:avLst/>
+          </a:prstGeom>
+          <a:noFill/>
+          <a:ln/>
+        </p:spPr>
+        <p:txBody>
+          <a:bodyPr wrap="square" lIns="0" tIns="0" rIns="0" bIns="0" rtlCol="0" anchor="t"/>
+          <a:lstStyle/>
+          <a:p>
+            <a:pPr algn="l" indent="0" marL="0">
+              <a:lnSpc>
+                <a:spcPts val="2880"/>
+              </a:lnSpc>
+              <a:buNone/>
+            </a:pPr>
+            <a:r>
+              <a:rPr lang="en-US" sz="2133" b="1" dirty="0">
+                <a:solidFill>
+                  <a:srgbClr val="F4F4F5"/>
+                </a:solidFill>
+                <a:latin typeface="Inter" pitchFamily="34" charset="0"/>
+                <a:ea typeface="Inter" pitchFamily="34" charset="-122"/>
+                <a:cs typeface="Inter" pitchFamily="34" charset="-120"/>
+              </a:rPr>
+              <a:t>Which gaps do we close?</a:t>
+            </a:r>
+            <a:endParaRPr lang="en-US" sz="2133" dirty="0"/>
+          </a:p>
+        </p:txBody>
+      </p:sp>
+      <p:sp>
+        <p:nvSpPr>
+          <p:cNvPr id="7" name="Text 5"/>
+          <p:cNvSpPr/>
+          <p:nvPr/>
+        </p:nvSpPr>
+        <p:spPr>
+          <a:xfrm>
+            <a:off x="1252423" y="2230437"/>
+            <a:ext cx="6281119" cy="343694"/>
+          </a:xfrm>
+          <a:prstGeom prst="rect">
+            <a:avLst/>
+          </a:prstGeom>
+          <a:noFill/>
+          <a:ln/>
+        </p:spPr>
+        <p:txBody>
+          <a:bodyPr wrap="square" lIns="0" tIns="0" rIns="0" bIns="0" rtlCol="0" anchor="t"/>
+          <a:lstStyle/>
+          <a:p>
+            <a:pPr algn="l" indent="0" marL="0">
+              <a:lnSpc>
+                <a:spcPts val="2706"/>
+              </a:lnSpc>
+              <a:spcBef>
+                <a:spcPts val="800"/>
+              </a:spcBef>
+              <a:buNone/>
+            </a:pPr>
+            <a:r>
+              <a:rPr lang="en-US" sz="1866" dirty="0">
+                <a:solidFill>
+                  <a:srgbClr val="9CA3AF"/>
+                </a:solidFill>
+                <a:latin typeface="Inter" pitchFamily="34" charset="0"/>
+                <a:ea typeface="Inter" pitchFamily="34" charset="-122"/>
+                <a:cs typeface="Inter" pitchFamily="34" charset="-120"/>
+              </a:rPr>
+              <a:t>Name them, price them, give each an owner and a date.</a:t>
+            </a:r>
+            <a:endParaRPr lang="en-US" sz="1866" dirty="0"/>
+          </a:p>
+        </p:txBody>
+      </p:sp>
+      <p:sp>
+        <p:nvSpPr>
+          <p:cNvPr id="8" name="Text 6"/>
+          <p:cNvSpPr/>
+          <p:nvPr/>
+        </p:nvSpPr>
+        <p:spPr>
+          <a:xfrm>
+            <a:off x="677098" y="2919016"/>
+            <a:ext cx="345219" cy="260747"/>
+          </a:xfrm>
+          <a:prstGeom prst="rect">
+            <a:avLst/>
+          </a:prstGeom>
+          <a:noFill/>
+          <a:ln/>
+        </p:spPr>
+        <p:txBody>
+          <a:bodyPr wrap="square" lIns="0" tIns="0" rIns="0" bIns="0" rtlCol="0" anchor="t"/>
+          <a:lstStyle/>
+          <a:p>
+            <a:pPr algn="l" indent="0" marL="0">
+              <a:lnSpc>
+                <a:spcPts val="2053"/>
+              </a:lnSpc>
+              <a:buNone/>
+            </a:pPr>
+            <a:r>
+              <a:rPr lang="en-US" sz="1466" dirty="0">
+                <a:solidFill>
+                  <a:srgbClr val="8B7BF0"/>
+                </a:solidFill>
+                <a:latin typeface="JetBrains Mono" pitchFamily="34" charset="0"/>
+                <a:ea typeface="JetBrains Mono" pitchFamily="34" charset="-122"/>
+                <a:cs typeface="JetBrains Mono" pitchFamily="34" charset="-120"/>
+              </a:rPr>
+              <a:t>02</a:t>
+            </a:r>
+            <a:endParaRPr lang="en-US" sz="1466" dirty="0"/>
+          </a:p>
+        </p:txBody>
+      </p:sp>
+      <p:sp>
+        <p:nvSpPr>
+          <p:cNvPr id="9" name="Text 7"/>
+          <p:cNvSpPr/>
+          <p:nvPr/>
+        </p:nvSpPr>
+        <p:spPr>
+          <a:xfrm>
+            <a:off x="1252423" y="2830116"/>
+            <a:ext cx="7446688" cy="365522"/>
+          </a:xfrm>
+          <a:prstGeom prst="rect">
+            <a:avLst/>
+          </a:prstGeom>
+          <a:noFill/>
+          <a:ln/>
+        </p:spPr>
+        <p:txBody>
+          <a:bodyPr wrap="square" lIns="0" tIns="0" rIns="0" bIns="0" rtlCol="0" anchor="t"/>
+          <a:lstStyle/>
+          <a:p>
+            <a:pPr algn="l" indent="0" marL="0">
+              <a:lnSpc>
+                <a:spcPts val="2880"/>
+              </a:lnSpc>
+              <a:buNone/>
+            </a:pPr>
+            <a:r>
+              <a:rPr lang="en-US" sz="2133" b="1" dirty="0">
+                <a:solidFill>
+                  <a:srgbClr val="F4F4F5"/>
+                </a:solidFill>
+                <a:latin typeface="Inter" pitchFamily="34" charset="0"/>
+                <a:ea typeface="Inter" pitchFamily="34" charset="-122"/>
+                <a:cs typeface="Inter" pitchFamily="34" charset="-120"/>
+              </a:rPr>
+              <a:t>Which gaps do we admit to?</a:t>
+            </a:r>
+            <a:endParaRPr lang="en-US" sz="2133" dirty="0"/>
+          </a:p>
+        </p:txBody>
+      </p:sp>
+      <p:sp>
+        <p:nvSpPr>
+          <p:cNvPr id="10" name="Text 8"/>
+          <p:cNvSpPr/>
+          <p:nvPr/>
+        </p:nvSpPr>
+        <p:spPr>
+          <a:xfrm>
+            <a:off x="1252423" y="3297238"/>
+            <a:ext cx="7446688" cy="343694"/>
+          </a:xfrm>
+          <a:prstGeom prst="rect">
+            <a:avLst/>
+          </a:prstGeom>
+          <a:noFill/>
+          <a:ln/>
+        </p:spPr>
+        <p:txBody>
+          <a:bodyPr wrap="square" lIns="0" tIns="0" rIns="0" bIns="0" rtlCol="0" anchor="t"/>
+          <a:lstStyle/>
+          <a:p>
+            <a:pPr algn="l" indent="0" marL="0">
+              <a:lnSpc>
+                <a:spcPts val="2706"/>
+              </a:lnSpc>
+              <a:spcBef>
+                <a:spcPts val="800"/>
+              </a:spcBef>
+              <a:buNone/>
+            </a:pPr>
+            <a:r>
+              <a:rPr lang="en-US" sz="1866" dirty="0">
+                <a:solidFill>
+                  <a:srgbClr val="9CA3AF"/>
+                </a:solidFill>
+                <a:latin typeface="Inter" pitchFamily="34" charset="0"/>
+                <a:ea typeface="Inter" pitchFamily="34" charset="-122"/>
+                <a:cs typeface="Inter" pitchFamily="34" charset="-120"/>
+              </a:rPr>
+              <a:t>Write them down as known-untested surface, not as an oversight.</a:t>
+            </a:r>
+            <a:endParaRPr lang="en-US" sz="1866" dirty="0"/>
+          </a:p>
+        </p:txBody>
+      </p:sp>
+      <p:sp>
+        <p:nvSpPr>
+          <p:cNvPr id="11" name="Text 9"/>
+          <p:cNvSpPr/>
+          <p:nvPr/>
+        </p:nvSpPr>
+        <p:spPr>
+          <a:xfrm>
+            <a:off x="677098" y="3985816"/>
+            <a:ext cx="345219" cy="260747"/>
+          </a:xfrm>
+          <a:prstGeom prst="rect">
+            <a:avLst/>
+          </a:prstGeom>
+          <a:noFill/>
+          <a:ln/>
+        </p:spPr>
+        <p:txBody>
+          <a:bodyPr wrap="square" lIns="0" tIns="0" rIns="0" bIns="0" rtlCol="0" anchor="t"/>
+          <a:lstStyle/>
+          <a:p>
+            <a:pPr algn="l" indent="0" marL="0">
+              <a:lnSpc>
+                <a:spcPts val="2053"/>
+              </a:lnSpc>
+              <a:buNone/>
+            </a:pPr>
+            <a:r>
+              <a:rPr lang="en-US" sz="1466" dirty="0">
+                <a:solidFill>
+                  <a:srgbClr val="8B7BF0"/>
+                </a:solidFill>
+                <a:latin typeface="JetBrains Mono" pitchFamily="34" charset="0"/>
+                <a:ea typeface="JetBrains Mono" pitchFamily="34" charset="-122"/>
+                <a:cs typeface="JetBrains Mono" pitchFamily="34" charset="-120"/>
+              </a:rPr>
+              <a:t>03</a:t>
+            </a:r>
+            <a:endParaRPr lang="en-US" sz="1466" dirty="0"/>
+          </a:p>
+        </p:txBody>
+      </p:sp>
+      <p:sp>
+        <p:nvSpPr>
+          <p:cNvPr id="12" name="Text 10"/>
+          <p:cNvSpPr/>
+          <p:nvPr/>
+        </p:nvSpPr>
+        <p:spPr>
+          <a:xfrm>
+            <a:off x="1252423" y="3896916"/>
+            <a:ext cx="7887014" cy="365522"/>
+          </a:xfrm>
+          <a:prstGeom prst="rect">
+            <a:avLst/>
+          </a:prstGeom>
+          <a:noFill/>
+          <a:ln/>
+        </p:spPr>
+        <p:txBody>
+          <a:bodyPr wrap="square" lIns="0" tIns="0" rIns="0" bIns="0" rtlCol="0" anchor="t"/>
+          <a:lstStyle/>
+          <a:p>
+            <a:pPr algn="l" indent="0" marL="0">
+              <a:lnSpc>
+                <a:spcPts val="2880"/>
+              </a:lnSpc>
+              <a:buNone/>
+            </a:pPr>
+            <a:r>
+              <a:rPr lang="en-US" sz="2133" b="1" dirty="0">
+                <a:solidFill>
+                  <a:srgbClr val="F4F4F5"/>
+                </a:solidFill>
+                <a:latin typeface="Inter" pitchFamily="34" charset="0"/>
+                <a:ea typeface="Inter" pitchFamily="34" charset="-122"/>
+                <a:cs typeface="Inter" pitchFamily="34" charset="-120"/>
+              </a:rPr>
+              <a:t>What does a staging pass stop meaning?</a:t>
+            </a:r>
+            <a:endParaRPr lang="en-US" sz="2133" dirty="0"/>
+          </a:p>
+        </p:txBody>
+      </p:sp>
+      <p:sp>
+        <p:nvSpPr>
+          <p:cNvPr id="13" name="Text 11"/>
+          <p:cNvSpPr/>
+          <p:nvPr/>
+        </p:nvSpPr>
+        <p:spPr>
+          <a:xfrm>
+            <a:off x="1252423" y="4364038"/>
+            <a:ext cx="7887014" cy="343694"/>
+          </a:xfrm>
+          <a:prstGeom prst="rect">
+            <a:avLst/>
+          </a:prstGeom>
+          <a:noFill/>
+          <a:ln/>
+        </p:spPr>
+        <p:txBody>
+          <a:bodyPr wrap="square" lIns="0" tIns="0" rIns="0" bIns="0" rtlCol="0" anchor="t"/>
+          <a:lstStyle/>
+          <a:p>
+            <a:pPr algn="l" indent="0" marL="0">
+              <a:lnSpc>
+                <a:spcPts val="2706"/>
+              </a:lnSpc>
+              <a:spcBef>
+                <a:spcPts val="800"/>
+              </a:spcBef>
+              <a:buNone/>
+            </a:pPr>
+            <a:r>
+              <a:rPr lang="en-US" sz="1866" dirty="0">
+                <a:solidFill>
+                  <a:srgbClr val="9CA3AF"/>
+                </a:solidFill>
+                <a:latin typeface="Inter" pitchFamily="34" charset="0"/>
+                <a:ea typeface="Inter" pitchFamily="34" charset="-122"/>
+                <a:cs typeface="Inter" pitchFamily="34" charset="-120"/>
+              </a:rPr>
+              <a:t>Agree the sentence we say instead, and put it in the release template.</a:t>
+            </a:r>
+            <a:endParaRPr lang="en-US" sz="1866" dirty="0"/>
+          </a:p>
+        </p:txBody>
+      </p:sp>
+      <p:sp>
+        <p:nvSpPr>
+          <p:cNvPr id="14" name="Shape 12"/>
+          <p:cNvSpPr/>
+          <p:nvPr/>
+        </p:nvSpPr>
+        <p:spPr>
+          <a:xfrm>
+            <a:off x="677098" y="5052814"/>
+            <a:ext cx="10834756" cy="0"/>
+          </a:xfrm>
+          <a:prstGeom prst="line">
+            <a:avLst/>
+          </a:prstGeom>
+          <a:noFill/>
+          <a:ln w="12698">
+            <a:solidFill>
+              <a:srgbClr val="26262C"/>
+            </a:solidFill>
+            <a:prstDash val="solid"/>
+          </a:ln>
+        </p:spPr>
+      </p:sp>
+      <p:sp>
+        <p:nvSpPr>
+          <p:cNvPr id="15" name="Shape 13"/>
+          <p:cNvSpPr/>
+          <p:nvPr/>
+        </p:nvSpPr>
+        <p:spPr>
+          <a:xfrm>
+            <a:off x="11505506" y="5046464"/>
+            <a:ext cx="0" cy="863600"/>
+          </a:xfrm>
+          <a:prstGeom prst="line">
+            <a:avLst/>
+          </a:prstGeom>
+          <a:noFill/>
+          <a:ln w="12698">
+            <a:solidFill>
+              <a:srgbClr val="26262C"/>
+            </a:solidFill>
+            <a:prstDash val="solid"/>
+          </a:ln>
+        </p:spPr>
+      </p:sp>
+      <p:sp>
+        <p:nvSpPr>
+          <p:cNvPr id="16" name="Shape 14"/>
+          <p:cNvSpPr/>
+          <p:nvPr/>
+        </p:nvSpPr>
+        <p:spPr>
+          <a:xfrm>
+            <a:off x="677098" y="5903714"/>
+            <a:ext cx="10834756" cy="0"/>
+          </a:xfrm>
+          <a:prstGeom prst="line">
+            <a:avLst/>
+          </a:prstGeom>
+          <a:noFill/>
+          <a:ln w="12698">
+            <a:solidFill>
+              <a:srgbClr val="26262C"/>
+            </a:solidFill>
+            <a:prstDash val="solid"/>
+          </a:ln>
+        </p:spPr>
+      </p:sp>
+      <p:sp>
+        <p:nvSpPr>
+          <p:cNvPr id="17" name="Shape 15"/>
+          <p:cNvSpPr/>
+          <p:nvPr/>
+        </p:nvSpPr>
+        <p:spPr>
+          <a:xfrm>
+            <a:off x="689795" y="5046464"/>
+            <a:ext cx="0" cy="863600"/>
+          </a:xfrm>
+          <a:prstGeom prst="line">
+            <a:avLst/>
+          </a:prstGeom>
+          <a:noFill/>
+          <a:ln w="25397">
+            <a:solidFill>
+              <a:srgbClr val="8B7BF0"/>
+            </a:solidFill>
+            <a:prstDash val="solid"/>
+          </a:ln>
+        </p:spPr>
+      </p:sp>
+      <p:sp>
+        <p:nvSpPr>
+          <p:cNvPr id="18" name="Text 16"/>
+          <p:cNvSpPr/>
+          <p:nvPr/>
+        </p:nvSpPr>
+        <p:spPr>
+          <a:xfrm>
+            <a:off x="939367" y="5262364"/>
+            <a:ext cx="10529374" cy="431800"/>
+          </a:xfrm>
+          <a:prstGeom prst="rect">
+            <a:avLst/>
+          </a:prstGeom>
+          <a:noFill/>
+          <a:ln/>
+        </p:spPr>
+        <p:txBody>
+          <a:bodyPr wrap="square" lIns="0" tIns="0" rIns="0" bIns="0" rtlCol="0" anchor="t"/>
+          <a:lstStyle/>
+          <a:p>
+            <a:pPr algn="l" indent="0" marL="0">
+              <a:lnSpc>
+                <a:spcPts val="3400"/>
+              </a:lnSpc>
+              <a:buNone/>
+            </a:pPr>
+            <a:r>
+              <a:rPr lang="en-US" sz="2266" dirty="0">
+                <a:solidFill>
+                  <a:srgbClr val="F4F4F5"/>
+                </a:solidFill>
+                <a:latin typeface="Inter" pitchFamily="34" charset="0"/>
+                <a:ea typeface="Inter" pitchFamily="34" charset="-122"/>
+                <a:cs typeface="Inter" pitchFamily="34" charset="-120"/>
+              </a:rPr>
+              <a:t>Until we decide, a staging pass means one thing: the code ran somewhere.</a:t>
+            </a:r>
+            <a:endParaRPr lang="en-US" sz="2266" dirty="0"/>
+          </a:p>
+        </p:txBody>
+      </p:sp>
+      <p:sp>
+        <p:nvSpPr>
+          <p:cNvPr id="19" name="Text 17"/>
+          <p:cNvSpPr/>
+          <p:nvPr/>
+        </p:nvSpPr>
+        <p:spPr>
+          <a:xfrm>
+            <a:off x="460403" y="6079331"/>
+            <a:ext cx="11051451" cy="236934"/>
+          </a:xfrm>
+          <a:prstGeom prst="rect">
+            <a:avLst/>
+          </a:prstGeom>
+          <a:noFill/>
+          <a:ln/>
+        </p:spPr>
+        <p:txBody>
+          <a:bodyPr wrap="square" lIns="0" tIns="0" rIns="0" bIns="0" rtlCol="0" anchor="t"/>
+          <a:lstStyle/>
+          <a:p>
+            <a:pPr algn="r" indent="0" marL="0">
+              <a:lnSpc>
+                <a:spcPts val="1866"/>
+              </a:lnSpc>
+              <a:buNone/>
+            </a:pPr>
+            <a:r>
+              <a:rPr lang="en-US" sz="1333" dirty="0">
+                <a:solidFill>
+                  <a:srgbClr val="6B7280"/>
+                </a:solidFill>
+                <a:latin typeface="Inter" pitchFamily="34" charset="0"/>
+                <a:ea typeface="Inter" pitchFamily="34" charset="-122"/>
+                <a:cs typeface="Inter" pitchFamily="34" charset="-120"/>
+              </a:rPr>
+              <a:t>No figures in this deck — the argument is mechanical, and no gap here can be sized from a source we can cite.</a:t>
+            </a:r>
+            <a:endParaRPr lang="en-US" sz="1333" dirty="0"/>
+          </a:p>
+        </p:txBody>
+      </p:sp>
     </p:spTree>
   </p:cSld>
   <p:clrMapOvr>

--- a/decks/staging-parity/staging-parity.pptx
+++ b/decks/staging-parity/staging-parity.pptx
@@ -1249,7 +1249,7 @@
           <a:ln/>
         </p:spPr>
         <p:txBody>
-          <a:bodyPr wrap="square" lIns="0" tIns="0" rIns="0" bIns="0" rtlCol="0" anchor="t"/>
+          <a:bodyPr wrap="none" lIns="0" tIns="0" rIns="0" bIns="0" rtlCol="0" anchor="t"/>
           <a:lstStyle/>
           <a:p>
             <a:pPr algn="l" indent="0" marL="0">
@@ -1291,7 +1291,7 @@
           <a:ln/>
         </p:spPr>
         <p:txBody>
-          <a:bodyPr wrap="square" lIns="0" tIns="0" rIns="0" bIns="0" rtlCol="0" anchor="t"/>
+          <a:bodyPr wrap="none" lIns="0" tIns="0" rIns="0" bIns="0" rtlCol="0" anchor="t"/>
           <a:lstStyle/>
           <a:p>
             <a:pPr algn="l" indent="0" marL="0">
@@ -1363,7 +1363,7 @@
           <a:ln/>
         </p:spPr>
         <p:txBody>
-          <a:bodyPr wrap="square" lIns="0" tIns="0" rIns="0" bIns="0" rtlCol="0" anchor="t"/>
+          <a:bodyPr wrap="none" lIns="0" tIns="0" rIns="0" bIns="0" rtlCol="0" anchor="t"/>
           <a:lstStyle/>
           <a:p>
             <a:pPr algn="l" indent="0" marL="0">
@@ -1408,7 +1408,9 @@
           <a:ln/>
         </p:spPr>
         <p:txBody>
-          <a:bodyPr wrap="square" lIns="0" tIns="0" rIns="0" bIns="0" rtlCol="0" anchor="t"/>
+          <a:bodyPr wrap="square" lIns="0" tIns="0" rIns="0" bIns="0" rtlCol="0" anchor="t">
+            <a:normAutofit/>
+          </a:bodyPr>
           <a:lstStyle/>
           <a:p>
             <a:pPr algn="l" indent="0" marL="0">
@@ -1453,7 +1455,7 @@
           <a:ln/>
         </p:spPr>
         <p:txBody>
-          <a:bodyPr wrap="square" lIns="0" tIns="0" rIns="0" bIns="0" rtlCol="0" anchor="t"/>
+          <a:bodyPr wrap="none" lIns="0" tIns="0" rIns="0" bIns="0" rtlCol="0" anchor="t"/>
           <a:lstStyle/>
           <a:p>
             <a:pPr algn="l" indent="0" marL="0">
@@ -1498,7 +1500,7 @@
           <a:ln/>
         </p:spPr>
         <p:txBody>
-          <a:bodyPr wrap="square" lIns="0" tIns="0" rIns="0" bIns="0" rtlCol="0" anchor="t"/>
+          <a:bodyPr wrap="none" lIns="0" tIns="0" rIns="0" bIns="0" rtlCol="0" anchor="t"/>
           <a:lstStyle/>
           <a:p>
             <a:pPr algn="r" indent="0" marL="0">
@@ -1572,7 +1574,7 @@
           <a:ln/>
         </p:spPr>
         <p:txBody>
-          <a:bodyPr wrap="square" lIns="0" tIns="0" rIns="0" bIns="0" rtlCol="0" anchor="t"/>
+          <a:bodyPr wrap="none" lIns="0" tIns="0" rIns="0" bIns="0" rtlCol="0" anchor="t"/>
           <a:lstStyle/>
           <a:p>
             <a:pPr algn="l" indent="0" marL="0">
@@ -1614,7 +1616,7 @@
           <a:ln/>
         </p:spPr>
         <p:txBody>
-          <a:bodyPr wrap="square" lIns="0" tIns="0" rIns="0" bIns="0" rtlCol="0" anchor="t"/>
+          <a:bodyPr wrap="none" lIns="0" tIns="0" rIns="0" bIns="0" rtlCol="0" anchor="t"/>
           <a:lstStyle/>
           <a:p>
             <a:pPr algn="l" indent="0" marL="0">
@@ -1656,7 +1658,7 @@
           <a:ln/>
         </p:spPr>
         <p:txBody>
-          <a:bodyPr wrap="square" lIns="0" tIns="0" rIns="0" bIns="0" rtlCol="0" anchor="t"/>
+          <a:bodyPr wrap="none" lIns="0" tIns="0" rIns="0" bIns="0" rtlCol="0" anchor="t"/>
           <a:lstStyle/>
           <a:p>
             <a:pPr algn="l" indent="0" marL="0">
@@ -1735,7 +1737,7 @@
           <a:ln/>
         </p:spPr>
         <p:txBody>
-          <a:bodyPr wrap="square" lIns="0" tIns="0" rIns="0" bIns="0" rtlCol="0" anchor="t"/>
+          <a:bodyPr wrap="none" lIns="0" tIns="0" rIns="0" bIns="0" rtlCol="0" anchor="t"/>
           <a:lstStyle/>
           <a:p>
             <a:pPr algn="l" indent="0" marL="0">
@@ -1777,7 +1779,7 @@
           <a:ln/>
         </p:spPr>
         <p:txBody>
-          <a:bodyPr wrap="square" lIns="0" tIns="0" rIns="0" bIns="0" rtlCol="0" anchor="t"/>
+          <a:bodyPr wrap="none" lIns="0" tIns="0" rIns="0" bIns="0" rtlCol="0" anchor="t"/>
           <a:lstStyle/>
           <a:p>
             <a:pPr algn="l" indent="0" marL="0">
@@ -1822,7 +1824,9 @@
           <a:ln/>
         </p:spPr>
         <p:txBody>
-          <a:bodyPr wrap="square" lIns="0" tIns="0" rIns="0" bIns="0" rtlCol="0" anchor="t"/>
+          <a:bodyPr wrap="square" lIns="0" tIns="0" rIns="0" bIns="0" rtlCol="0" anchor="t">
+            <a:normAutofit/>
+          </a:bodyPr>
           <a:lstStyle/>
           <a:p>
             <a:pPr algn="l" indent="0" marL="0">
@@ -1931,7 +1935,7 @@
           <a:ln/>
         </p:spPr>
         <p:txBody>
-          <a:bodyPr wrap="square" lIns="0" tIns="0" rIns="0" bIns="0" rtlCol="0" anchor="t"/>
+          <a:bodyPr wrap="none" lIns="0" tIns="0" rIns="0" bIns="0" rtlCol="0" anchor="t"/>
           <a:lstStyle/>
           <a:p>
             <a:pPr algn="l" indent="0" marL="0">
@@ -1973,7 +1977,7 @@
           <a:ln/>
         </p:spPr>
         <p:txBody>
-          <a:bodyPr wrap="square" lIns="0" tIns="0" rIns="0" bIns="0" rtlCol="0" anchor="t"/>
+          <a:bodyPr wrap="none" lIns="0" tIns="0" rIns="0" bIns="0" rtlCol="0" anchor="t"/>
           <a:lstStyle/>
           <a:p>
             <a:pPr algn="l" indent="0" marL="0">
@@ -2018,7 +2022,9 @@
           <a:ln/>
         </p:spPr>
         <p:txBody>
-          <a:bodyPr wrap="square" lIns="0" tIns="0" rIns="0" bIns="0" rtlCol="0" anchor="t"/>
+          <a:bodyPr wrap="square" lIns="0" tIns="0" rIns="0" bIns="0" rtlCol="0" anchor="t">
+            <a:normAutofit/>
+          </a:bodyPr>
           <a:lstStyle/>
           <a:p>
             <a:pPr algn="l" indent="0" marL="0">
@@ -2127,7 +2133,7 @@
           <a:ln/>
         </p:spPr>
         <p:txBody>
-          <a:bodyPr wrap="square" lIns="0" tIns="0" rIns="0" bIns="0" rtlCol="0" anchor="t"/>
+          <a:bodyPr wrap="none" lIns="0" tIns="0" rIns="0" bIns="0" rtlCol="0" anchor="t"/>
           <a:lstStyle/>
           <a:p>
             <a:pPr algn="l" indent="0" marL="0">
@@ -2169,7 +2175,7 @@
           <a:ln/>
         </p:spPr>
         <p:txBody>
-          <a:bodyPr wrap="square" lIns="0" tIns="0" rIns="0" bIns="0" rtlCol="0" anchor="t"/>
+          <a:bodyPr wrap="none" lIns="0" tIns="0" rIns="0" bIns="0" rtlCol="0" anchor="t"/>
           <a:lstStyle/>
           <a:p>
             <a:pPr algn="l" indent="0" marL="0">
@@ -2214,7 +2220,9 @@
           <a:ln/>
         </p:spPr>
         <p:txBody>
-          <a:bodyPr wrap="square" lIns="0" tIns="0" rIns="0" bIns="0" rtlCol="0" anchor="t"/>
+          <a:bodyPr wrap="square" lIns="0" tIns="0" rIns="0" bIns="0" rtlCol="0" anchor="t">
+            <a:normAutofit/>
+          </a:bodyPr>
           <a:lstStyle/>
           <a:p>
             <a:pPr algn="l" indent="0" marL="0">
@@ -2263,6 +2271,10 @@
             <a:prstDash val="solid"/>
           </a:ln>
         </p:spPr>
+        <p:txBody>
+          <a:bodyPr/>
+          <a:p/>
+        </p:txBody>
       </p:sp>
       <p:sp>
         <p:nvSpPr>
@@ -2286,6 +2298,10 @@
             <a:prstDash val="solid"/>
           </a:ln>
         </p:spPr>
+        <p:txBody>
+          <a:bodyPr/>
+          <a:p/>
+        </p:txBody>
       </p:sp>
       <p:sp>
         <p:nvSpPr>
@@ -2309,6 +2325,10 @@
             <a:prstDash val="solid"/>
           </a:ln>
         </p:spPr>
+        <p:txBody>
+          <a:bodyPr/>
+          <a:p/>
+        </p:txBody>
       </p:sp>
       <p:sp>
         <p:nvSpPr>
@@ -2332,6 +2352,10 @@
             <a:prstDash val="solid"/>
           </a:ln>
         </p:spPr>
+        <p:txBody>
+          <a:bodyPr/>
+          <a:p/>
+        </p:txBody>
       </p:sp>
       <p:sp>
         <p:nvSpPr>
@@ -2351,7 +2375,9 @@
           <a:ln/>
         </p:spPr>
         <p:txBody>
-          <a:bodyPr wrap="square" lIns="0" tIns="0" rIns="0" bIns="0" rtlCol="0" anchor="t"/>
+          <a:bodyPr wrap="square" lIns="0" tIns="0" rIns="0" bIns="0" rtlCol="0" anchor="t">
+            <a:normAutofit/>
+          </a:bodyPr>
           <a:lstStyle/>
           <a:p>
             <a:pPr algn="l" indent="0" marL="0">
@@ -2393,7 +2419,7 @@
           <a:ln/>
         </p:spPr>
         <p:txBody>
-          <a:bodyPr wrap="square" lIns="0" tIns="0" rIns="0" bIns="0" rtlCol="0" anchor="t"/>
+          <a:bodyPr wrap="none" lIns="0" tIns="0" rIns="0" bIns="0" rtlCol="0" anchor="t"/>
           <a:lstStyle/>
           <a:p>
             <a:pPr algn="r" indent="0" marL="0">
@@ -2467,7 +2493,7 @@
           <a:ln/>
         </p:spPr>
         <p:txBody>
-          <a:bodyPr wrap="square" lIns="0" tIns="0" rIns="0" bIns="0" rtlCol="0" anchor="t"/>
+          <a:bodyPr wrap="none" lIns="0" tIns="0" rIns="0" bIns="0" rtlCol="0" anchor="t"/>
           <a:lstStyle/>
           <a:p>
             <a:pPr algn="l" indent="0" marL="0">
@@ -2509,7 +2535,7 @@
           <a:ln/>
         </p:spPr>
         <p:txBody>
-          <a:bodyPr wrap="square" lIns="0" tIns="0" rIns="0" bIns="0" rtlCol="0" anchor="t"/>
+          <a:bodyPr wrap="none" lIns="0" tIns="0" rIns="0" bIns="0" rtlCol="0" anchor="t"/>
           <a:lstStyle/>
           <a:p>
             <a:pPr algn="l" indent="0" marL="0">
@@ -2551,7 +2577,7 @@
           <a:ln/>
         </p:spPr>
         <p:txBody>
-          <a:bodyPr wrap="square" lIns="0" tIns="0" rIns="0" bIns="0" rtlCol="0" anchor="t"/>
+          <a:bodyPr wrap="none" lIns="0" tIns="0" rIns="0" bIns="0" rtlCol="0" anchor="t"/>
           <a:lstStyle/>
           <a:p>
             <a:pPr algn="l" indent="0" marL="0">
@@ -2630,7 +2656,7 @@
           <a:ln/>
         </p:spPr>
         <p:txBody>
-          <a:bodyPr wrap="square" lIns="0" tIns="0" rIns="0" bIns="0" rtlCol="0" anchor="t"/>
+          <a:bodyPr wrap="none" lIns="0" tIns="0" rIns="0" bIns="0" rtlCol="0" anchor="t"/>
           <a:lstStyle/>
           <a:p>
             <a:pPr algn="l" indent="0" marL="0">
@@ -2672,7 +2698,7 @@
           <a:ln/>
         </p:spPr>
         <p:txBody>
-          <a:bodyPr wrap="square" lIns="0" tIns="0" rIns="0" bIns="0" rtlCol="0" anchor="t"/>
+          <a:bodyPr wrap="none" lIns="0" tIns="0" rIns="0" bIns="0" rtlCol="0" anchor="t"/>
           <a:lstStyle/>
           <a:p>
             <a:pPr algn="l" indent="0" marL="0">
@@ -2714,7 +2740,9 @@
           <a:ln/>
         </p:spPr>
         <p:txBody>
-          <a:bodyPr wrap="square" lIns="0" tIns="0" rIns="0" bIns="0" rtlCol="0" anchor="t"/>
+          <a:bodyPr wrap="square" lIns="0" tIns="0" rIns="0" bIns="0" rtlCol="0" anchor="t">
+            <a:normAutofit/>
+          </a:bodyPr>
           <a:lstStyle/>
           <a:p>
             <a:pPr algn="l" indent="0" marL="0">
@@ -2793,7 +2821,7 @@
           <a:ln/>
         </p:spPr>
         <p:txBody>
-          <a:bodyPr wrap="square" lIns="0" tIns="0" rIns="0" bIns="0" rtlCol="0" anchor="t"/>
+          <a:bodyPr wrap="none" lIns="0" tIns="0" rIns="0" bIns="0" rtlCol="0" anchor="t"/>
           <a:lstStyle/>
           <a:p>
             <a:pPr algn="l" indent="0" marL="0">
@@ -2835,7 +2863,7 @@
           <a:ln/>
         </p:spPr>
         <p:txBody>
-          <a:bodyPr wrap="square" lIns="0" tIns="0" rIns="0" bIns="0" rtlCol="0" anchor="t"/>
+          <a:bodyPr wrap="none" lIns="0" tIns="0" rIns="0" bIns="0" rtlCol="0" anchor="t"/>
           <a:lstStyle/>
           <a:p>
             <a:pPr algn="l" indent="0" marL="0">
@@ -2877,7 +2905,9 @@
           <a:ln/>
         </p:spPr>
         <p:txBody>
-          <a:bodyPr wrap="square" lIns="0" tIns="0" rIns="0" bIns="0" rtlCol="0" anchor="t"/>
+          <a:bodyPr wrap="square" lIns="0" tIns="0" rIns="0" bIns="0" rtlCol="0" anchor="t">
+            <a:normAutofit/>
+          </a:bodyPr>
           <a:lstStyle/>
           <a:p>
             <a:pPr algn="l" indent="0" marL="0">
@@ -2956,7 +2986,7 @@
           <a:ln/>
         </p:spPr>
         <p:txBody>
-          <a:bodyPr wrap="square" lIns="0" tIns="0" rIns="0" bIns="0" rtlCol="0" anchor="t"/>
+          <a:bodyPr wrap="none" lIns="0" tIns="0" rIns="0" bIns="0" rtlCol="0" anchor="t"/>
           <a:lstStyle/>
           <a:p>
             <a:pPr algn="l" indent="0" marL="0">
@@ -2998,7 +3028,7 @@
           <a:ln/>
         </p:spPr>
         <p:txBody>
-          <a:bodyPr wrap="square" lIns="0" tIns="0" rIns="0" bIns="0" rtlCol="0" anchor="t"/>
+          <a:bodyPr wrap="none" lIns="0" tIns="0" rIns="0" bIns="0" rtlCol="0" anchor="t"/>
           <a:lstStyle/>
           <a:p>
             <a:pPr algn="l" indent="0" marL="0">
@@ -3040,7 +3070,9 @@
           <a:ln/>
         </p:spPr>
         <p:txBody>
-          <a:bodyPr wrap="square" lIns="0" tIns="0" rIns="0" bIns="0" rtlCol="0" anchor="t"/>
+          <a:bodyPr wrap="square" lIns="0" tIns="0" rIns="0" bIns="0" rtlCol="0" anchor="t">
+            <a:normAutofit/>
+          </a:bodyPr>
           <a:lstStyle/>
           <a:p>
             <a:pPr algn="l" indent="0" marL="0">
@@ -3119,7 +3151,7 @@
           <a:ln/>
         </p:spPr>
         <p:txBody>
-          <a:bodyPr wrap="square" lIns="0" tIns="0" rIns="0" bIns="0" rtlCol="0" anchor="t"/>
+          <a:bodyPr wrap="none" lIns="0" tIns="0" rIns="0" bIns="0" rtlCol="0" anchor="t"/>
           <a:lstStyle/>
           <a:p>
             <a:pPr algn="l" indent="0" marL="0">
@@ -3161,7 +3193,7 @@
           <a:ln/>
         </p:spPr>
         <p:txBody>
-          <a:bodyPr wrap="square" lIns="0" tIns="0" rIns="0" bIns="0" rtlCol="0" anchor="t"/>
+          <a:bodyPr wrap="none" lIns="0" tIns="0" rIns="0" bIns="0" rtlCol="0" anchor="t"/>
           <a:lstStyle/>
           <a:p>
             <a:pPr algn="l" indent="0" marL="0">
@@ -3203,7 +3235,9 @@
           <a:ln/>
         </p:spPr>
         <p:txBody>
-          <a:bodyPr wrap="square" lIns="0" tIns="0" rIns="0" bIns="0" rtlCol="0" anchor="t"/>
+          <a:bodyPr wrap="square" lIns="0" tIns="0" rIns="0" bIns="0" rtlCol="0" anchor="t">
+            <a:normAutofit/>
+          </a:bodyPr>
           <a:lstStyle/>
           <a:p>
             <a:pPr algn="l" indent="0" marL="0">
@@ -3248,7 +3282,7 @@
           <a:ln/>
         </p:spPr>
         <p:txBody>
-          <a:bodyPr wrap="square" lIns="0" tIns="0" rIns="0" bIns="0" rtlCol="0" anchor="t"/>
+          <a:bodyPr wrap="none" lIns="0" tIns="0" rIns="0" bIns="0" rtlCol="0" anchor="t"/>
           <a:lstStyle/>
           <a:p>
             <a:pPr algn="r" indent="0" marL="0">
@@ -3322,7 +3356,7 @@
           <a:ln/>
         </p:spPr>
         <p:txBody>
-          <a:bodyPr wrap="square" lIns="0" tIns="0" rIns="0" bIns="0" rtlCol="0" anchor="t"/>
+          <a:bodyPr wrap="none" lIns="0" tIns="0" rIns="0" bIns="0" rtlCol="0" anchor="t"/>
           <a:lstStyle/>
           <a:p>
             <a:pPr algn="l" indent="0" marL="0">
@@ -3364,7 +3398,7 @@
           <a:ln/>
         </p:spPr>
         <p:txBody>
-          <a:bodyPr wrap="square" lIns="0" tIns="0" rIns="0" bIns="0" rtlCol="0" anchor="t"/>
+          <a:bodyPr wrap="none" lIns="0" tIns="0" rIns="0" bIns="0" rtlCol="0" anchor="t"/>
           <a:lstStyle/>
           <a:p>
             <a:pPr algn="l" indent="0" marL="0">
@@ -3406,7 +3440,7 @@
           <a:ln/>
         </p:spPr>
         <p:txBody>
-          <a:bodyPr wrap="square" lIns="0" tIns="0" rIns="0" bIns="0" rtlCol="0" anchor="t"/>
+          <a:bodyPr wrap="none" lIns="0" tIns="0" rIns="0" bIns="0" rtlCol="0" anchor="t"/>
           <a:lstStyle/>
           <a:p>
             <a:pPr algn="l" indent="0" marL="0">
@@ -3485,7 +3519,7 @@
           <a:ln/>
         </p:spPr>
         <p:txBody>
-          <a:bodyPr wrap="square" lIns="0" tIns="0" rIns="0" bIns="0" rtlCol="0" anchor="t"/>
+          <a:bodyPr wrap="none" lIns="0" tIns="0" rIns="0" bIns="0" rtlCol="0" anchor="t"/>
           <a:lstStyle/>
           <a:p>
             <a:pPr algn="l" indent="0" marL="0">
@@ -3527,7 +3561,7 @@
           <a:ln/>
         </p:spPr>
         <p:txBody>
-          <a:bodyPr wrap="square" lIns="0" tIns="0" rIns="0" bIns="0" rtlCol="0" anchor="t"/>
+          <a:bodyPr wrap="none" lIns="0" tIns="0" rIns="0" bIns="0" rtlCol="0" anchor="t"/>
           <a:lstStyle/>
           <a:p>
             <a:pPr algn="l" indent="0" marL="0">
@@ -3721,7 +3755,7 @@
           <a:ln/>
         </p:spPr>
         <p:txBody>
-          <a:bodyPr wrap="square" lIns="0" tIns="0" rIns="0" bIns="0" rtlCol="0" anchor="t"/>
+          <a:bodyPr wrap="none" lIns="0" tIns="0" rIns="0" bIns="0" rtlCol="0" anchor="t"/>
           <a:lstStyle/>
           <a:p>
             <a:pPr algn="l" indent="0" marL="0">
@@ -3763,7 +3797,7 @@
           <a:ln/>
         </p:spPr>
         <p:txBody>
-          <a:bodyPr wrap="square" lIns="0" tIns="0" rIns="0" bIns="0" rtlCol="0" anchor="t"/>
+          <a:bodyPr wrap="none" lIns="0" tIns="0" rIns="0" bIns="0" rtlCol="0" anchor="t"/>
           <a:lstStyle/>
           <a:p>
             <a:pPr algn="l" indent="0" marL="0">
@@ -3927,6 +3961,10 @@
             <a:prstDash val="solid"/>
           </a:ln>
         </p:spPr>
+        <p:txBody>
+          <a:bodyPr/>
+          <a:p/>
+        </p:txBody>
       </p:sp>
       <p:sp>
         <p:nvSpPr>
@@ -3950,6 +3988,10 @@
             <a:prstDash val="solid"/>
           </a:ln>
         </p:spPr>
+        <p:txBody>
+          <a:bodyPr/>
+          <a:p/>
+        </p:txBody>
       </p:sp>
       <p:sp>
         <p:nvSpPr>
@@ -3973,6 +4015,10 @@
             <a:prstDash val="solid"/>
           </a:ln>
         </p:spPr>
+        <p:txBody>
+          <a:bodyPr/>
+          <a:p/>
+        </p:txBody>
       </p:sp>
       <p:sp>
         <p:nvSpPr>
@@ -3996,6 +4042,10 @@
             <a:prstDash val="solid"/>
           </a:ln>
         </p:spPr>
+        <p:txBody>
+          <a:bodyPr/>
+          <a:p/>
+        </p:txBody>
       </p:sp>
       <p:sp>
         <p:nvSpPr>
@@ -4015,7 +4065,7 @@
           <a:ln/>
         </p:spPr>
         <p:txBody>
-          <a:bodyPr wrap="square" lIns="0" tIns="0" rIns="0" bIns="0" rtlCol="0" anchor="t"/>
+          <a:bodyPr wrap="none" lIns="0" tIns="0" rIns="0" bIns="0" rtlCol="0" anchor="t"/>
           <a:lstStyle/>
           <a:p>
             <a:pPr algn="l" indent="0" marL="0">
@@ -4057,7 +4107,7 @@
           <a:ln/>
         </p:spPr>
         <p:txBody>
-          <a:bodyPr wrap="square" lIns="0" tIns="0" rIns="0" bIns="0" rtlCol="0" anchor="t"/>
+          <a:bodyPr wrap="none" lIns="0" tIns="0" rIns="0" bIns="0" rtlCol="0" anchor="t"/>
           <a:lstStyle/>
           <a:p>
             <a:pPr algn="r" indent="0" marL="0">
@@ -4131,7 +4181,7 @@
           <a:ln/>
         </p:spPr>
         <p:txBody>
-          <a:bodyPr wrap="square" lIns="0" tIns="0" rIns="0" bIns="0" rtlCol="0" anchor="t"/>
+          <a:bodyPr wrap="none" lIns="0" tIns="0" rIns="0" bIns="0" rtlCol="0" anchor="t"/>
           <a:lstStyle/>
           <a:p>
             <a:pPr algn="l" indent="0" marL="0">
@@ -4173,7 +4223,7 @@
           <a:ln/>
         </p:spPr>
         <p:txBody>
-          <a:bodyPr wrap="square" lIns="0" tIns="0" rIns="0" bIns="0" rtlCol="0" anchor="t"/>
+          <a:bodyPr wrap="none" lIns="0" tIns="0" rIns="0" bIns="0" rtlCol="0" anchor="t"/>
           <a:lstStyle/>
           <a:p>
             <a:pPr algn="l" indent="0" marL="0">
@@ -4215,7 +4265,7 @@
           <a:ln/>
         </p:spPr>
         <p:txBody>
-          <a:bodyPr wrap="square" lIns="0" tIns="0" rIns="0" bIns="0" rtlCol="0" anchor="t"/>
+          <a:bodyPr wrap="none" lIns="0" tIns="0" rIns="0" bIns="0" rtlCol="0" anchor="t"/>
           <a:lstStyle/>
           <a:p>
             <a:pPr algn="l" indent="0" marL="0">
@@ -4260,7 +4310,7 @@
           <a:ln/>
         </p:spPr>
         <p:txBody>
-          <a:bodyPr wrap="square" lIns="0" tIns="0" rIns="0" bIns="0" rtlCol="0" anchor="t"/>
+          <a:bodyPr wrap="none" lIns="0" tIns="0" rIns="0" bIns="0" rtlCol="0" anchor="t"/>
           <a:lstStyle/>
           <a:p>
             <a:pPr algn="l" indent="0" marL="0">
@@ -4302,7 +4352,7 @@
           <a:ln/>
         </p:spPr>
         <p:txBody>
-          <a:bodyPr wrap="square" lIns="0" tIns="0" rIns="0" bIns="0" rtlCol="0" anchor="t"/>
+          <a:bodyPr wrap="none" lIns="0" tIns="0" rIns="0" bIns="0" rtlCol="0" anchor="t"/>
           <a:lstStyle/>
           <a:p>
             <a:pPr algn="l" indent="0" marL="0">
@@ -4344,7 +4394,7 @@
           <a:ln/>
         </p:spPr>
         <p:txBody>
-          <a:bodyPr wrap="square" lIns="0" tIns="0" rIns="0" bIns="0" rtlCol="0" anchor="t"/>
+          <a:bodyPr wrap="none" lIns="0" tIns="0" rIns="0" bIns="0" rtlCol="0" anchor="t"/>
           <a:lstStyle/>
           <a:p>
             <a:pPr algn="l" indent="0" marL="0">
@@ -4389,7 +4439,7 @@
           <a:ln/>
         </p:spPr>
         <p:txBody>
-          <a:bodyPr wrap="square" lIns="0" tIns="0" rIns="0" bIns="0" rtlCol="0" anchor="t"/>
+          <a:bodyPr wrap="none" lIns="0" tIns="0" rIns="0" bIns="0" rtlCol="0" anchor="t"/>
           <a:lstStyle/>
           <a:p>
             <a:pPr algn="l" indent="0" marL="0">
@@ -4431,7 +4481,7 @@
           <a:ln/>
         </p:spPr>
         <p:txBody>
-          <a:bodyPr wrap="square" lIns="0" tIns="0" rIns="0" bIns="0" rtlCol="0" anchor="t"/>
+          <a:bodyPr wrap="none" lIns="0" tIns="0" rIns="0" bIns="0" rtlCol="0" anchor="t"/>
           <a:lstStyle/>
           <a:p>
             <a:pPr algn="l" indent="0" marL="0">
@@ -4473,7 +4523,7 @@
           <a:ln/>
         </p:spPr>
         <p:txBody>
-          <a:bodyPr wrap="square" lIns="0" tIns="0" rIns="0" bIns="0" rtlCol="0" anchor="t"/>
+          <a:bodyPr wrap="none" lIns="0" tIns="0" rIns="0" bIns="0" rtlCol="0" anchor="t"/>
           <a:lstStyle/>
           <a:p>
             <a:pPr algn="l" indent="0" marL="0">
@@ -4518,7 +4568,7 @@
           <a:ln/>
         </p:spPr>
         <p:txBody>
-          <a:bodyPr wrap="square" lIns="0" tIns="0" rIns="0" bIns="0" rtlCol="0" anchor="t"/>
+          <a:bodyPr wrap="none" lIns="0" tIns="0" rIns="0" bIns="0" rtlCol="0" anchor="t"/>
           <a:lstStyle/>
           <a:p>
             <a:pPr algn="l" indent="0" marL="0">
@@ -4560,7 +4610,7 @@
           <a:ln/>
         </p:spPr>
         <p:txBody>
-          <a:bodyPr wrap="square" lIns="0" tIns="0" rIns="0" bIns="0" rtlCol="0" anchor="t"/>
+          <a:bodyPr wrap="none" lIns="0" tIns="0" rIns="0" bIns="0" rtlCol="0" anchor="t"/>
           <a:lstStyle/>
           <a:p>
             <a:pPr algn="l" indent="0" marL="0">
@@ -4602,7 +4652,7 @@
           <a:ln/>
         </p:spPr>
         <p:txBody>
-          <a:bodyPr wrap="square" lIns="0" tIns="0" rIns="0" bIns="0" rtlCol="0" anchor="t"/>
+          <a:bodyPr wrap="none" lIns="0" tIns="0" rIns="0" bIns="0" rtlCol="0" anchor="t"/>
           <a:lstStyle/>
           <a:p>
             <a:pPr algn="l" indent="0" marL="0">
@@ -4651,6 +4701,10 @@
             <a:prstDash val="solid"/>
           </a:ln>
         </p:spPr>
+        <p:txBody>
+          <a:bodyPr/>
+          <a:p/>
+        </p:txBody>
       </p:sp>
       <p:sp>
         <p:nvSpPr>
@@ -4674,6 +4728,10 @@
             <a:prstDash val="solid"/>
           </a:ln>
         </p:spPr>
+        <p:txBody>
+          <a:bodyPr/>
+          <a:p/>
+        </p:txBody>
       </p:sp>
       <p:sp>
         <p:nvSpPr>
@@ -4697,6 +4755,10 @@
             <a:prstDash val="solid"/>
           </a:ln>
         </p:spPr>
+        <p:txBody>
+          <a:bodyPr/>
+          <a:p/>
+        </p:txBody>
       </p:sp>
       <p:sp>
         <p:nvSpPr>
@@ -4720,6 +4782,10 @@
             <a:prstDash val="solid"/>
           </a:ln>
         </p:spPr>
+        <p:txBody>
+          <a:bodyPr/>
+          <a:p/>
+        </p:txBody>
       </p:sp>
       <p:sp>
         <p:nvSpPr>
@@ -4739,7 +4805,7 @@
           <a:ln/>
         </p:spPr>
         <p:txBody>
-          <a:bodyPr wrap="square" lIns="0" tIns="0" rIns="0" bIns="0" rtlCol="0" anchor="t"/>
+          <a:bodyPr wrap="none" lIns="0" tIns="0" rIns="0" bIns="0" rtlCol="0" anchor="t"/>
           <a:lstStyle/>
           <a:p>
             <a:pPr algn="l" indent="0" marL="0">
@@ -4781,7 +4847,7 @@
           <a:ln/>
         </p:spPr>
         <p:txBody>
-          <a:bodyPr wrap="square" lIns="0" tIns="0" rIns="0" bIns="0" rtlCol="0" anchor="t"/>
+          <a:bodyPr wrap="none" lIns="0" tIns="0" rIns="0" bIns="0" rtlCol="0" anchor="t"/>
           <a:lstStyle/>
           <a:p>
             <a:pPr algn="r" indent="0" marL="0">

--- a/decks/staging-parity/staging-parity.pptx
+++ b/decks/staging-parity/staging-parity.pptx
@@ -4805,7 +4805,9 @@
           <a:ln/>
         </p:spPr>
         <p:txBody>
-          <a:bodyPr wrap="none" lIns="0" tIns="0" rIns="0" bIns="0" rtlCol="0" anchor="t"/>
+          <a:bodyPr wrap="square" lIns="0" tIns="0" rIns="0" bIns="0" rtlCol="0" anchor="t">
+            <a:normAutofit/>
+          </a:bodyPr>
           <a:lstStyle/>
           <a:p>
             <a:pPr algn="l" indent="0" marL="0">
